--- a/leander-ppt/templates/leander-ppt-scaffold/output/leander-ppt-scaffold-sample.pptx
+++ b/leander-ppt/templates/leander-ppt-scaffold/output/leander-ppt-scaffold-sample.pptx
@@ -13,9 +13,10 @@
     <p:sldId id="261" r:id="rId7"/>
     <p:sldId id="262" r:id="rId8"/>
     <p:sldId id="263" r:id="rId9"/>
+    <p:sldId id="264" r:id="rId10"/>
   </p:sldIdLst>
   <p:notesMasterIdLst>
-    <p:notesMasterId r:id="rId10"/>
+    <p:notesMasterId r:id="rId11"/>
   </p:notesMasterIdLst>
   <p:sldSz cx="12191695" cy="6858000"/>
   <p:notesSz cx="6858000" cy="12191695"/>
@@ -1199,6 +1200,98 @@
 </p:notes>
 </file>
 
+<file path=ppt/notesSlides/notesSlide9.xml><?xml version="1.0" encoding="utf-8"?>
+<p:notes xmlns:a="http://schemas.openxmlformats.org/drawingml/2006/main" xmlns:r="http://schemas.openxmlformats.org/officeDocument/2006/relationships" xmlns:p="http://schemas.openxmlformats.org/presentationml/2006/main">
+  <p:cSld>
+    <p:spTree>
+      <p:nvGrpSpPr>
+        <p:cNvPr id="1" name=""/>
+        <p:cNvGrpSpPr/>
+        <p:nvPr/>
+      </p:nvGrpSpPr>
+      <p:grpSpPr>
+        <a:xfrm>
+          <a:off x="0" y="0"/>
+          <a:ext cx="0" cy="0"/>
+          <a:chOff x="0" y="0"/>
+          <a:chExt cx="0" cy="0"/>
+        </a:xfrm>
+      </p:grpSpPr>
+      <p:sp>
+        <p:nvSpPr>
+          <p:cNvPr id="2" name="Slide Image Placeholder 1"/>
+          <p:cNvSpPr>
+            <a:spLocks noGrp="1" noRot="1" noChangeAspect="1"/>
+          </p:cNvSpPr>
+          <p:nvPr>
+            <p:ph type="sldImg"/>
+          </p:nvPr>
+        </p:nvSpPr>
+        <p:spPr/>
+      </p:sp>
+      <p:sp>
+        <p:nvSpPr>
+          <p:cNvPr id="3" name="Notes Placeholder 2"/>
+          <p:cNvSpPr>
+            <a:spLocks noGrp="1"/>
+          </p:cNvSpPr>
+          <p:nvPr>
+            <p:ph type="body" idx="1"/>
+          </p:nvPr>
+        </p:nvSpPr>
+        <p:spPr/>
+        <p:txBody>
+          <a:bodyPr/>
+          <a:lstStyle/>
+          <a:p>
+            <a:r>
+              <a:rPr lang="en-US" dirty="0"/>
+              <a:t>Chapter ID: ch03-system-components
+Page ID: p09
+Takeaway: Back cover mirrors the Westwell reference: centered slogan + Make a Well Change.
+Visual intent: closing
+Component source: ppt-component</a:t>
+            </a:r>
+            <a:endParaRPr lang="en-US" dirty="0"/>
+          </a:p>
+        </p:txBody>
+      </p:sp>
+      <p:sp>
+        <p:nvSpPr>
+          <p:cNvPr id="4" name="Slide Number Placeholder 3"/>
+          <p:cNvSpPr>
+            <a:spLocks noGrp="1"/>
+          </p:cNvSpPr>
+          <p:nvPr>
+            <p:ph type="sldNum" sz="quarter" idx="10"/>
+          </p:nvPr>
+        </p:nvSpPr>
+        <p:spPr/>
+        <p:txBody>
+          <a:bodyPr/>
+          <a:lstStyle/>
+          <a:p>
+            <a:fld id="{F7021451-1387-4CA6-816F-3879F97B5CBC}" type="slidenum">
+              <a:rPr lang="en-US"/>
+              <a:t>9</a:t>
+            </a:fld>
+            <a:endParaRPr lang="en-US"/>
+          </a:p>
+        </p:txBody>
+      </p:sp>
+    </p:spTree>
+    <p:extLst>
+      <p:ext uri="{BB962C8B-B14F-4D97-AF65-F5344CB8AC3E}">
+        <p14:creationId xmlns:p14="http://schemas.microsoft.com/office/powerpoint/2010/main" val="1024086991"/>
+      </p:ext>
+    </p:extLst>
+  </p:cSld>
+  <p:clrMapOvr>
+    <a:masterClrMapping/>
+  </p:clrMapOvr>
+</p:notes>
+</file>
+
 <file path=ppt/slideLayouts/slideLayout1.xml><?xml version="1.0" encoding="utf-8"?>
 <p:sldLayout xmlns:a="http://schemas.openxmlformats.org/drawingml/2006/main" xmlns:r="http://schemas.openxmlformats.org/officeDocument/2006/relationships" xmlns:p="http://schemas.openxmlformats.org/presentationml/2006/main" preserve="1">
   <p:cSld name="DEFAULT">
@@ -1530,16 +1623,40 @@
           <a:chExt cx="0" cy="0"/>
         </a:xfrm>
       </p:grpSpPr>
-      <p:sp>
-        <p:nvSpPr>
-          <p:cNvPr id="3" name="Text 0"/>
-          <p:cNvSpPr/>
-          <p:nvPr/>
-        </p:nvSpPr>
-        <p:spPr>
-          <a:xfrm>
-            <a:off x="2667305" y="1904695"/>
-            <a:ext cx="8255203" cy="711403"/>
+      <p:pic>
+        <p:nvPicPr>
+          <p:cNvPr id="3" name="Image 0" descr="theme/assets/logo-westwell.png">    </p:cNvPr>
+          <p:cNvPicPr>
+            <a:picLocks noChangeAspect="1"/>
+          </p:cNvPicPr>
+          <p:nvPr/>
+        </p:nvPicPr>
+        <p:blipFill>
+          <a:blip r:embed="rId1"/>
+          <a:stretch>
+            <a:fillRect/>
+          </a:stretch>
+        </p:blipFill>
+        <p:spPr>
+          <a:xfrm>
+            <a:off x="11162995" y="520294"/>
+            <a:ext cx="571500" cy="462686"/>
+          </a:xfrm>
+          <a:prstGeom prst="rect">
+            <a:avLst/>
+          </a:prstGeom>
+        </p:spPr>
+      </p:pic>
+      <p:sp>
+        <p:nvSpPr>
+          <p:cNvPr id="4" name="Text 0"/>
+          <p:cNvSpPr/>
+          <p:nvPr/>
+        </p:nvSpPr>
+        <p:spPr>
+          <a:xfrm>
+            <a:off x="3301898" y="2095805"/>
+            <a:ext cx="7619695" cy="609905"/>
           </a:xfrm>
           <a:prstGeom prst="rect">
             <a:avLst/>
@@ -1560,7 +1677,7 @@
               <a:buNone/>
             </a:pPr>
             <a:r>
-              <a:rPr lang="en-US" sz="4400" b="1" dirty="0">
+              <a:rPr lang="en-US" sz="3200" b="1" dirty="0">
                 <a:solidFill>
                   <a:srgbClr val="C51516"/>
                 </a:solidFill>
@@ -1568,33 +1685,31 @@
                 <a:ea typeface="Microsoft YaHei" pitchFamily="34" charset="-122"/>
                 <a:cs typeface="Microsoft YaHei" pitchFamily="34" charset="-120"/>
               </a:rPr>
-              <a:t>Leander PPT</a:t>
-            </a:r>
-            <a:endParaRPr lang="en-US" sz="4400" dirty="0"/>
-          </a:p>
-        </p:txBody>
-      </p:sp>
-      <p:sp>
-        <p:nvSpPr>
-          <p:cNvPr id="4" name="Text 1"/>
-          <p:cNvSpPr/>
-          <p:nvPr/>
-        </p:nvSpPr>
-        <p:spPr>
-          <a:xfrm>
-            <a:off x="2667305" y="2730398"/>
-            <a:ext cx="8255203" cy="254203"/>
-          </a:xfrm>
-          <a:prstGeom prst="rect">
-            <a:avLst/>
-          </a:prstGeom>
-          <a:noFill/>
-          <a:ln/>
-        </p:spPr>
-        <p:txBody>
-          <a:bodyPr wrap="square" lIns="0" tIns="0" rIns="0" bIns="0" rtlCol="0" anchor="t">
-            <a:normAutofit/>
-          </a:bodyPr>
+              <a:t>Leander PPT 脚手架</a:t>
+            </a:r>
+            <a:endParaRPr lang="en-US" sz="3200" dirty="0"/>
+          </a:p>
+        </p:txBody>
+      </p:sp>
+      <p:sp>
+        <p:nvSpPr>
+          <p:cNvPr id="5" name="Text 1"/>
+          <p:cNvSpPr/>
+          <p:nvPr/>
+        </p:nvSpPr>
+        <p:spPr>
+          <a:xfrm>
+            <a:off x="3301898" y="2743200"/>
+            <a:ext cx="7619695" cy="317297"/>
+          </a:xfrm>
+          <a:prstGeom prst="rect">
+            <a:avLst/>
+          </a:prstGeom>
+          <a:noFill/>
+          <a:ln/>
+        </p:spPr>
+        <p:txBody>
+          <a:bodyPr wrap="square" lIns="0" tIns="0" rIns="0" bIns="0" rtlCol="0" anchor="t"/>
           <a:lstStyle/>
           <a:p>
             <a:pPr algn="r" indent="0" marL="0">
@@ -1604,7 +1719,7 @@
               <a:buNone/>
             </a:pPr>
             <a:r>
-              <a:rPr lang="en-US" sz="1300" dirty="0">
+              <a:rPr lang="en-US" sz="1500" b="1" dirty="0">
                 <a:solidFill>
                   <a:srgbClr val="C51516"/>
                 </a:solidFill>
@@ -1612,22 +1727,22 @@
                 <a:ea typeface="Century Gothic" pitchFamily="34" charset="-122"/>
                 <a:cs typeface="Century Gothic" pitchFamily="34" charset="-120"/>
               </a:rPr>
-              <a:t>Reusable Presentation Scaffold</a:t>
-            </a:r>
-            <a:endParaRPr lang="en-US" sz="1300" dirty="0"/>
-          </a:p>
-        </p:txBody>
-      </p:sp>
-      <p:sp>
-        <p:nvSpPr>
-          <p:cNvPr id="5" name="Text 2"/>
-          <p:cNvSpPr/>
-          <p:nvPr/>
-        </p:nvSpPr>
-        <p:spPr>
-          <a:xfrm>
-            <a:off x="2667305" y="3238805"/>
-            <a:ext cx="8255203" cy="254203"/>
+              <a:t>Reusable Editable Deck Scaffold</a:t>
+            </a:r>
+            <a:endParaRPr lang="en-US" sz="1500" dirty="0"/>
+          </a:p>
+        </p:txBody>
+      </p:sp>
+      <p:sp>
+        <p:nvSpPr>
+          <p:cNvPr id="6" name="Text 2"/>
+          <p:cNvSpPr/>
+          <p:nvPr/>
+        </p:nvSpPr>
+        <p:spPr>
+          <a:xfrm>
+            <a:off x="3301898" y="4381805"/>
+            <a:ext cx="7619695" cy="279806"/>
           </a:xfrm>
           <a:prstGeom prst="rect">
             <a:avLst/>
@@ -1648,7 +1763,115 @@
               <a:buNone/>
             </a:pPr>
             <a:r>
-              <a:rPr lang="en-US" sz="1300" dirty="0">
+              <a:rPr lang="en-US" sz="1500" b="1" dirty="0">
+                <a:solidFill>
+                  <a:srgbClr val="3D3A32"/>
+                </a:solidFill>
+                <a:latin typeface="Century Gothic" pitchFamily="34" charset="0"/>
+                <a:ea typeface="Century Gothic" pitchFamily="34" charset="-122"/>
+                <a:cs typeface="Century Gothic" pitchFamily="34" charset="-120"/>
+              </a:rPr>
+              <a:t>Make a Well Change.</a:t>
+            </a:r>
+            <a:endParaRPr lang="en-US" sz="1500" dirty="0"/>
+          </a:p>
+        </p:txBody>
+      </p:sp>
+      <p:sp>
+        <p:nvSpPr>
+          <p:cNvPr id="7" name="Text 3"/>
+          <p:cNvSpPr/>
+          <p:nvPr/>
+        </p:nvSpPr>
+        <p:spPr>
+          <a:xfrm>
+            <a:off x="3810305" y="4711903"/>
+            <a:ext cx="7112203" cy="355702"/>
+          </a:xfrm>
+          <a:prstGeom prst="rect">
+            <a:avLst/>
+          </a:prstGeom>
+          <a:noFill/>
+          <a:ln/>
+        </p:spPr>
+        <p:txBody>
+          <a:bodyPr wrap="square" lIns="0" tIns="0" rIns="0" bIns="0" rtlCol="0" anchor="t">
+            <a:normAutofit/>
+          </a:bodyPr>
+          <a:lstStyle/>
+          <a:p>
+            <a:pPr algn="r" indent="0" marL="0">
+              <a:lnSpc>
+                <a:spcPct val="120000"/>
+              </a:lnSpc>
+              <a:buNone/>
+            </a:pPr>
+            <a:r>
+              <a:rPr lang="en-US" sz="700" dirty="0">
+                <a:solidFill>
+                  <a:srgbClr val="A8A39A"/>
+                </a:solidFill>
+                <a:latin typeface="Century Gothic" pitchFamily="34" charset="0"/>
+                <a:ea typeface="Century Gothic" pitchFamily="34" charset="-122"/>
+                <a:cs typeface="Century Gothic" pitchFamily="34" charset="-120"/>
+              </a:rPr>
+              <a:t>We continuously expand, optimize and try out our products and solutions</a:t>
+            </a:r>
+            <a:endParaRPr lang="en-US" sz="700" dirty="0"/>
+          </a:p>
+          <a:p>
+            <a:pPr algn="r" indent="0" marL="0">
+              <a:lnSpc>
+                <a:spcPct val="120000"/>
+              </a:lnSpc>
+              <a:buNone/>
+            </a:pPr>
+            <a:r>
+              <a:rPr lang="en-US" sz="700" dirty="0">
+                <a:solidFill>
+                  <a:srgbClr val="A8A39A"/>
+                </a:solidFill>
+                <a:latin typeface="Century Gothic" pitchFamily="34" charset="0"/>
+                <a:ea typeface="Century Gothic" pitchFamily="34" charset="-122"/>
+                <a:cs typeface="Century Gothic" pitchFamily="34" charset="-120"/>
+              </a:rPr>
+              <a:t>to pinpoint the optimal relationship between AI and human beings in different industries</a:t>
+            </a:r>
+            <a:endParaRPr lang="en-US" sz="700" dirty="0"/>
+          </a:p>
+        </p:txBody>
+      </p:sp>
+      <p:sp>
+        <p:nvSpPr>
+          <p:cNvPr id="8" name="Text 4"/>
+          <p:cNvSpPr/>
+          <p:nvPr/>
+        </p:nvSpPr>
+        <p:spPr>
+          <a:xfrm>
+            <a:off x="660197" y="5715000"/>
+            <a:ext cx="5080406" cy="228600"/>
+          </a:xfrm>
+          <a:prstGeom prst="rect">
+            <a:avLst/>
+          </a:prstGeom>
+          <a:noFill/>
+          <a:ln/>
+        </p:spPr>
+        <p:txBody>
+          <a:bodyPr wrap="square" lIns="0" tIns="0" rIns="0" bIns="0" rtlCol="0" anchor="t">
+            <a:normAutofit/>
+          </a:bodyPr>
+          <a:lstStyle/>
+          <a:p>
+            <a:pPr algn="l" indent="0" marL="0">
+              <a:lnSpc>
+                <a:spcPct val="100000"/>
+              </a:lnSpc>
+              <a:buNone/>
+            </a:pPr>
+            <a:r>
+              <a:rPr lang="en-US" sz="800" dirty="0">
                 <a:solidFill>
                   <a:srgbClr val="666666"/>
                 </a:solidFill>
@@ -1656,59 +1879,15 @@
                 <a:ea typeface="Microsoft YaHei" pitchFamily="34" charset="-122"/>
                 <a:cs typeface="Microsoft YaHei" pitchFamily="34" charset="-120"/>
               </a:rPr>
-              <a:t>brief -&gt; outline -&gt; theme -&gt; samples -&gt; deck -&gt; QA</a:t>
-            </a:r>
-            <a:endParaRPr lang="en-US" sz="1300" dirty="0"/>
-          </a:p>
-        </p:txBody>
-      </p:sp>
-      <p:sp>
-        <p:nvSpPr>
-          <p:cNvPr id="6" name="Text 3"/>
-          <p:cNvSpPr/>
-          <p:nvPr/>
-        </p:nvSpPr>
-        <p:spPr>
-          <a:xfrm>
-            <a:off x="660197" y="5562295"/>
-            <a:ext cx="4190695" cy="267005"/>
-          </a:xfrm>
-          <a:prstGeom prst="rect">
-            <a:avLst/>
-          </a:prstGeom>
-          <a:noFill/>
-          <a:ln/>
-        </p:spPr>
-        <p:txBody>
-          <a:bodyPr wrap="square" lIns="0" tIns="0" rIns="0" bIns="0" rtlCol="0" anchor="t">
-            <a:normAutofit/>
-          </a:bodyPr>
-          <a:lstStyle/>
-          <a:p>
-            <a:pPr algn="l" indent="0" marL="0">
-              <a:lnSpc>
-                <a:spcPct val="100000"/>
-              </a:lnSpc>
-              <a:buNone/>
-            </a:pPr>
-            <a:r>
-              <a:rPr lang="en-US" sz="900" dirty="0">
-                <a:solidFill>
-                  <a:srgbClr val="666666"/>
-                </a:solidFill>
-                <a:latin typeface="Microsoft YaHei" pitchFamily="34" charset="0"/>
-                <a:ea typeface="Microsoft YaHei" pitchFamily="34" charset="-122"/>
-                <a:cs typeface="Microsoft YaHei" pitchFamily="34" charset="-120"/>
-              </a:rPr>
-              <a:t>p01 / scaffold sample</a:t>
-            </a:r>
-            <a:endParaRPr lang="en-US" sz="900" dirty="0"/>
-          </a:p>
-        </p:txBody>
-      </p:sp>
-      <p:sp>
-        <p:nvSpPr>
-          <p:cNvPr id="7" name="Shape 4"/>
+              <a:t>p01 / scaffold sample · 2026</a:t>
+            </a:r>
+            <a:endParaRPr lang="en-US" sz="800" dirty="0"/>
+          </a:p>
+        </p:txBody>
+      </p:sp>
+      <p:sp>
+        <p:nvSpPr>
+          <p:cNvPr id="9" name="Shape 5"/>
           <p:cNvSpPr/>
           <p:nvPr/>
         </p:nvSpPr>
@@ -2184,7 +2363,7 @@
         <p:spPr>
           <a:xfrm>
             <a:off x="609905" y="457200"/>
-            <a:ext cx="9525305" cy="368503"/>
+            <a:ext cx="9905695" cy="368503"/>
           </a:xfrm>
           <a:prstGeom prst="rect">
             <a:avLst/>
@@ -2209,9 +2388,9 @@
                 <a:solidFill>
                   <a:srgbClr val="C51516"/>
                 </a:solidFill>
-                <a:latin typeface="Microsoft YaHei" pitchFamily="34" charset="0"/>
-                <a:ea typeface="Microsoft YaHei" pitchFamily="34" charset="-122"/>
-                <a:cs typeface="Microsoft YaHei" pitchFamily="34" charset="-120"/>
+                <a:latin typeface="Century Gothic" pitchFamily="34" charset="0"/>
+                <a:ea typeface="Century Gothic" pitchFamily="34" charset="-122"/>
+                <a:cs typeface="Century Gothic" pitchFamily="34" charset="-120"/>
               </a:rPr>
               <a:t>Three Metric Cards</a:t>
             </a:r>
@@ -2248,7 +2427,7 @@
         <p:spPr>
           <a:xfrm>
             <a:off x="609905" y="1041502"/>
-            <a:ext cx="9778594" cy="215798"/>
+            <a:ext cx="9525305" cy="215798"/>
           </a:xfrm>
           <a:prstGeom prst="rect">
             <a:avLst/>
@@ -2273,9 +2452,9 @@
                 <a:solidFill>
                   <a:srgbClr val="666666"/>
                 </a:solidFill>
-                <a:latin typeface="Microsoft YaHei" pitchFamily="34" charset="0"/>
-                <a:ea typeface="Microsoft YaHei" pitchFamily="34" charset="-122"/>
-                <a:cs typeface="Microsoft YaHei" pitchFamily="34" charset="-120"/>
+                <a:latin typeface="Century Gothic" pitchFamily="34" charset="0"/>
+                <a:ea typeface="Century Gothic" pitchFamily="34" charset="-122"/>
+                <a:cs typeface="Century Gothic" pitchFamily="34" charset="-120"/>
               </a:rPr>
               <a:t>For quantified value, benchmark evidence, and staged benefits.</a:t>
             </a:r>
@@ -2283,9 +2462,33 @@
           </a:p>
         </p:txBody>
       </p:sp>
-      <p:sp>
-        <p:nvSpPr>
-          <p:cNvPr id="6" name="Shape 3"/>
+      <p:pic>
+        <p:nvPicPr>
+          <p:cNvPr id="6" name="Image 0" descr="theme/assets/logo-westwell.png">    </p:cNvPr>
+          <p:cNvPicPr>
+            <a:picLocks noChangeAspect="1"/>
+          </p:cNvPicPr>
+          <p:nvPr/>
+        </p:nvPicPr>
+        <p:blipFill>
+          <a:blip r:embed="rId1"/>
+          <a:stretch>
+            <a:fillRect/>
+          </a:stretch>
+        </p:blipFill>
+        <p:spPr>
+          <a:xfrm>
+            <a:off x="11162995" y="520294"/>
+            <a:ext cx="571500" cy="462686"/>
+          </a:xfrm>
+          <a:prstGeom prst="rect">
+            <a:avLst/>
+          </a:prstGeom>
+        </p:spPr>
+      </p:pic>
+      <p:sp>
+        <p:nvSpPr>
+          <p:cNvPr id="7" name="Shape 3"/>
           <p:cNvSpPr/>
           <p:nvPr/>
         </p:nvSpPr>
@@ -2319,7 +2522,7 @@
       </p:sp>
       <p:sp>
         <p:nvSpPr>
-          <p:cNvPr id="7" name="Shape 4"/>
+          <p:cNvPr id="8" name="Shape 4"/>
           <p:cNvSpPr/>
           <p:nvPr/>
         </p:nvSpPr>
@@ -2339,7 +2542,7 @@
       </p:sp>
       <p:sp>
         <p:nvSpPr>
-          <p:cNvPr id="8" name="Text 5"/>
+          <p:cNvPr id="9" name="Text 5"/>
           <p:cNvSpPr/>
           <p:nvPr/>
         </p:nvSpPr>
@@ -2383,7 +2586,7 @@
       </p:sp>
       <p:sp>
         <p:nvSpPr>
-          <p:cNvPr id="9" name="Text 6"/>
+          <p:cNvPr id="10" name="Text 6"/>
           <p:cNvSpPr/>
           <p:nvPr/>
         </p:nvSpPr>
@@ -2427,7 +2630,7 @@
       </p:sp>
       <p:sp>
         <p:nvSpPr>
-          <p:cNvPr id="10" name="Text 7"/>
+          <p:cNvPr id="11" name="Text 7"/>
           <p:cNvSpPr/>
           <p:nvPr/>
         </p:nvSpPr>
@@ -2471,7 +2674,7 @@
       </p:sp>
       <p:sp>
         <p:nvSpPr>
-          <p:cNvPr id="11" name="Shape 8"/>
+          <p:cNvPr id="12" name="Shape 8"/>
           <p:cNvSpPr/>
           <p:nvPr/>
         </p:nvSpPr>
@@ -2505,7 +2708,7 @@
       </p:sp>
       <p:sp>
         <p:nvSpPr>
-          <p:cNvPr id="12" name="Shape 9"/>
+          <p:cNvPr id="13" name="Shape 9"/>
           <p:cNvSpPr/>
           <p:nvPr/>
         </p:nvSpPr>
@@ -2525,7 +2728,7 @@
       </p:sp>
       <p:sp>
         <p:nvSpPr>
-          <p:cNvPr id="13" name="Text 10"/>
+          <p:cNvPr id="14" name="Text 10"/>
           <p:cNvSpPr/>
           <p:nvPr/>
         </p:nvSpPr>
@@ -2569,7 +2772,7 @@
       </p:sp>
       <p:sp>
         <p:nvSpPr>
-          <p:cNvPr id="14" name="Text 11"/>
+          <p:cNvPr id="15" name="Text 11"/>
           <p:cNvSpPr/>
           <p:nvPr/>
         </p:nvSpPr>
@@ -2613,7 +2816,7 @@
       </p:sp>
       <p:sp>
         <p:nvSpPr>
-          <p:cNvPr id="15" name="Text 12"/>
+          <p:cNvPr id="16" name="Text 12"/>
           <p:cNvSpPr/>
           <p:nvPr/>
         </p:nvSpPr>
@@ -2657,7 +2860,7 @@
       </p:sp>
       <p:sp>
         <p:nvSpPr>
-          <p:cNvPr id="16" name="Shape 13"/>
+          <p:cNvPr id="17" name="Shape 13"/>
           <p:cNvSpPr/>
           <p:nvPr/>
         </p:nvSpPr>
@@ -2691,7 +2894,7 @@
       </p:sp>
       <p:sp>
         <p:nvSpPr>
-          <p:cNvPr id="17" name="Shape 14"/>
+          <p:cNvPr id="18" name="Shape 14"/>
           <p:cNvSpPr/>
           <p:nvPr/>
         </p:nvSpPr>
@@ -2711,7 +2914,7 @@
       </p:sp>
       <p:sp>
         <p:nvSpPr>
-          <p:cNvPr id="18" name="Text 15"/>
+          <p:cNvPr id="19" name="Text 15"/>
           <p:cNvSpPr/>
           <p:nvPr/>
         </p:nvSpPr>
@@ -2755,7 +2958,7 @@
       </p:sp>
       <p:sp>
         <p:nvSpPr>
-          <p:cNvPr id="19" name="Text 16"/>
+          <p:cNvPr id="20" name="Text 16"/>
           <p:cNvSpPr/>
           <p:nvPr/>
         </p:nvSpPr>
@@ -2799,7 +3002,7 @@
       </p:sp>
       <p:sp>
         <p:nvSpPr>
-          <p:cNvPr id="20" name="Text 17"/>
+          <p:cNvPr id="21" name="Text 17"/>
           <p:cNvSpPr/>
           <p:nvPr/>
         </p:nvSpPr>
@@ -2843,7 +3046,7 @@
       </p:sp>
       <p:sp>
         <p:nvSpPr>
-          <p:cNvPr id="21" name="Shape 18"/>
+          <p:cNvPr id="22" name="Shape 18"/>
           <p:cNvSpPr/>
           <p:nvPr/>
         </p:nvSpPr>
@@ -2870,7 +3073,7 @@
       </p:sp>
       <p:sp>
         <p:nvSpPr>
-          <p:cNvPr id="22" name="Text 19"/>
+          <p:cNvPr id="23" name="Text 19"/>
           <p:cNvSpPr/>
           <p:nvPr/>
         </p:nvSpPr>
@@ -2914,7 +3117,7 @@
       </p:sp>
       <p:sp>
         <p:nvSpPr>
-          <p:cNvPr id="23" name="Shape 20"/>
+          <p:cNvPr id="24" name="Shape 20"/>
           <p:cNvSpPr/>
           <p:nvPr/>
         </p:nvSpPr>
@@ -2973,7 +3176,7 @@
         <p:spPr>
           <a:xfrm>
             <a:off x="609905" y="457200"/>
-            <a:ext cx="9525305" cy="368503"/>
+            <a:ext cx="9905695" cy="368503"/>
           </a:xfrm>
           <a:prstGeom prst="rect">
             <a:avLst/>
@@ -2997,91 +3200,199 @@
               <a:rPr lang="en-US" sz="2000" b="1" dirty="0">
                 <a:solidFill>
                   <a:srgbClr val="C51516"/>
+                </a:solidFill>
+                <a:latin typeface="Century Gothic" pitchFamily="34" charset="0"/>
+                <a:ea typeface="Century Gothic" pitchFamily="34" charset="-122"/>
+                <a:cs typeface="Century Gothic" pitchFamily="34" charset="-120"/>
+              </a:rPr>
+              <a:t>Big Word + Card Matrix</a:t>
+            </a:r>
+            <a:endParaRPr lang="en-US" sz="2000" dirty="0"/>
+          </a:p>
+        </p:txBody>
+      </p:sp>
+      <p:sp>
+        <p:nvSpPr>
+          <p:cNvPr id="4" name="Shape 1"/>
+          <p:cNvSpPr/>
+          <p:nvPr/>
+        </p:nvSpPr>
+        <p:spPr>
+          <a:xfrm>
+            <a:off x="609905" y="914400"/>
+            <a:ext cx="4826203" cy="19202"/>
+          </a:xfrm>
+          <a:prstGeom prst="rect">
+            <a:avLst/>
+          </a:prstGeom>
+          <a:solidFill>
+            <a:srgbClr val="C51516"/>
+          </a:solidFill>
+          <a:ln/>
+        </p:spPr>
+      </p:sp>
+      <p:sp>
+        <p:nvSpPr>
+          <p:cNvPr id="5" name="Text 2"/>
+          <p:cNvSpPr/>
+          <p:nvPr/>
+        </p:nvSpPr>
+        <p:spPr>
+          <a:xfrm>
+            <a:off x="609905" y="1041502"/>
+            <a:ext cx="9525305" cy="215798"/>
+          </a:xfrm>
+          <a:prstGeom prst="rect">
+            <a:avLst/>
+          </a:prstGeom>
+          <a:noFill/>
+          <a:ln/>
+        </p:spPr>
+        <p:txBody>
+          <a:bodyPr wrap="square" lIns="0" tIns="0" rIns="0" bIns="0" rtlCol="0" anchor="t">
+            <a:normAutofit/>
+          </a:bodyPr>
+          <a:lstStyle/>
+          <a:p>
+            <a:pPr algn="l" indent="0" marL="0">
+              <a:lnSpc>
+                <a:spcPct val="100000"/>
+              </a:lnSpc>
+              <a:buNone/>
+            </a:pPr>
+            <a:r>
+              <a:rPr lang="en-US" sz="900" dirty="0">
+                <a:solidFill>
+                  <a:srgbClr val="666666"/>
+                </a:solidFill>
+                <a:latin typeface="Century Gothic" pitchFamily="34" charset="0"/>
+                <a:ea typeface="Century Gothic" pitchFamily="34" charset="-122"/>
+                <a:cs typeface="Century Gothic" pitchFamily="34" charset="-120"/>
+              </a:rPr>
+              <a:t>For strategic judgement, value statements, and operating principles.</a:t>
+            </a:r>
+            <a:endParaRPr lang="en-US" sz="900" dirty="0"/>
+          </a:p>
+        </p:txBody>
+      </p:sp>
+      <p:pic>
+        <p:nvPicPr>
+          <p:cNvPr id="6" name="Image 0" descr="theme/assets/logo-westwell.png">    </p:cNvPr>
+          <p:cNvPicPr>
+            <a:picLocks noChangeAspect="1"/>
+          </p:cNvPicPr>
+          <p:nvPr/>
+        </p:nvPicPr>
+        <p:blipFill>
+          <a:blip r:embed="rId1"/>
+          <a:stretch>
+            <a:fillRect/>
+          </a:stretch>
+        </p:blipFill>
+        <p:spPr>
+          <a:xfrm>
+            <a:off x="11162995" y="520294"/>
+            <a:ext cx="571500" cy="462686"/>
+          </a:xfrm>
+          <a:prstGeom prst="rect">
+            <a:avLst/>
+          </a:prstGeom>
+        </p:spPr>
+      </p:pic>
+      <p:sp>
+        <p:nvSpPr>
+          <p:cNvPr id="7" name="Text 3"/>
+          <p:cNvSpPr/>
+          <p:nvPr/>
+        </p:nvSpPr>
+        <p:spPr>
+          <a:xfrm>
+            <a:off x="685800" y="1815998"/>
+            <a:ext cx="2920594" cy="888797"/>
+          </a:xfrm>
+          <a:prstGeom prst="rect">
+            <a:avLst/>
+          </a:prstGeom>
+          <a:noFill/>
+          <a:ln/>
+        </p:spPr>
+        <p:txBody>
+          <a:bodyPr wrap="square" lIns="0" tIns="0" rIns="0" bIns="0" rtlCol="0" anchor="t">
+            <a:normAutofit/>
+          </a:bodyPr>
+          <a:lstStyle/>
+          <a:p>
+            <a:pPr algn="l" indent="0" marL="0">
+              <a:lnSpc>
+                <a:spcPct val="88000"/>
+              </a:lnSpc>
+              <a:buNone/>
+            </a:pPr>
+            <a:r>
+              <a:rPr lang="en-US" sz="2900" b="1" dirty="0">
+                <a:solidFill>
+                  <a:srgbClr val="07195A"/>
                 </a:solidFill>
                 <a:latin typeface="Microsoft YaHei" pitchFamily="34" charset="0"/>
                 <a:ea typeface="Microsoft YaHei" pitchFamily="34" charset="-122"/>
                 <a:cs typeface="Microsoft YaHei" pitchFamily="34" charset="-120"/>
               </a:rPr>
-              <a:t>Big Word + Card Matrix</a:t>
-            </a:r>
-            <a:endParaRPr lang="en-US" sz="2000" dirty="0"/>
-          </a:p>
-        </p:txBody>
-      </p:sp>
-      <p:sp>
-        <p:nvSpPr>
-          <p:cNvPr id="4" name="Shape 1"/>
-          <p:cNvSpPr/>
-          <p:nvPr/>
-        </p:nvSpPr>
-        <p:spPr>
-          <a:xfrm>
-            <a:off x="609905" y="914400"/>
-            <a:ext cx="4826203" cy="19202"/>
-          </a:xfrm>
-          <a:prstGeom prst="rect">
-            <a:avLst/>
-          </a:prstGeom>
-          <a:solidFill>
-            <a:srgbClr val="C51516"/>
-          </a:solidFill>
-          <a:ln/>
-        </p:spPr>
-      </p:sp>
-      <p:sp>
-        <p:nvSpPr>
-          <p:cNvPr id="5" name="Text 2"/>
-          <p:cNvSpPr/>
-          <p:nvPr/>
-        </p:nvSpPr>
-        <p:spPr>
-          <a:xfrm>
-            <a:off x="609905" y="1041502"/>
-            <a:ext cx="9778594" cy="215798"/>
-          </a:xfrm>
-          <a:prstGeom prst="rect">
-            <a:avLst/>
-          </a:prstGeom>
-          <a:noFill/>
-          <a:ln/>
-        </p:spPr>
-        <p:txBody>
-          <a:bodyPr wrap="square" lIns="0" tIns="0" rIns="0" bIns="0" rtlCol="0" anchor="t">
-            <a:normAutofit/>
-          </a:bodyPr>
-          <a:lstStyle/>
+              <a:t>Lower Cost</a:t>
+            </a:r>
+            <a:endParaRPr lang="en-US" sz="2900" dirty="0"/>
+          </a:p>
           <a:p>
             <a:pPr algn="l" indent="0" marL="0">
               <a:lnSpc>
-                <a:spcPct val="100000"/>
-              </a:lnSpc>
-              <a:buNone/>
-            </a:pPr>
-            <a:r>
-              <a:rPr lang="en-US" sz="900" dirty="0">
-                <a:solidFill>
-                  <a:srgbClr val="666666"/>
+                <a:spcPct val="88000"/>
+              </a:lnSpc>
+              <a:buNone/>
+            </a:pPr>
+            <a:r>
+              <a:rPr lang="en-US" sz="2900" b="1" dirty="0">
+                <a:solidFill>
+                  <a:srgbClr val="07195A"/>
                 </a:solidFill>
                 <a:latin typeface="Microsoft YaHei" pitchFamily="34" charset="0"/>
                 <a:ea typeface="Microsoft YaHei" pitchFamily="34" charset="-122"/>
                 <a:cs typeface="Microsoft YaHei" pitchFamily="34" charset="-120"/>
               </a:rPr>
-              <a:t>For strategic judgement, value statements, and operating principles.</a:t>
-            </a:r>
-            <a:endParaRPr lang="en-US" sz="900" dirty="0"/>
-          </a:p>
-        </p:txBody>
-      </p:sp>
-      <p:sp>
-        <p:nvSpPr>
-          <p:cNvPr id="6" name="Text 3"/>
-          <p:cNvSpPr/>
-          <p:nvPr/>
-        </p:nvSpPr>
-        <p:spPr>
-          <a:xfrm>
-            <a:off x="685800" y="1815998"/>
-            <a:ext cx="2920594" cy="888797"/>
+              <a:t>Raise Speed</a:t>
+            </a:r>
+            <a:endParaRPr lang="en-US" sz="2900" dirty="0"/>
+          </a:p>
+        </p:txBody>
+      </p:sp>
+      <p:sp>
+        <p:nvSpPr>
+          <p:cNvPr id="8" name="Shape 4"/>
+          <p:cNvSpPr/>
+          <p:nvPr/>
+        </p:nvSpPr>
+        <p:spPr>
+          <a:xfrm>
+            <a:off x="685800" y="3301898"/>
+            <a:ext cx="38405" cy="558698"/>
+          </a:xfrm>
+          <a:prstGeom prst="rect">
+            <a:avLst/>
+          </a:prstGeom>
+          <a:solidFill>
+            <a:srgbClr val="C51516"/>
+          </a:solidFill>
+          <a:ln/>
+        </p:spPr>
+      </p:sp>
+      <p:sp>
+        <p:nvSpPr>
+          <p:cNvPr id="9" name="Text 5"/>
+          <p:cNvSpPr/>
+          <p:nvPr/>
+        </p:nvSpPr>
+        <p:spPr>
+          <a:xfrm>
+            <a:off x="863194" y="3314700"/>
+            <a:ext cx="2667305" cy="470002"/>
           </a:xfrm>
           <a:prstGeom prst="rect">
             <a:avLst/>
@@ -3097,103 +3408,19 @@
           <a:p>
             <a:pPr algn="l" indent="0" marL="0">
               <a:lnSpc>
-                <a:spcPct val="88000"/>
-              </a:lnSpc>
-              <a:buNone/>
-            </a:pPr>
-            <a:r>
-              <a:rPr lang="en-US" sz="2900" b="1" dirty="0">
-                <a:solidFill>
-                  <a:srgbClr val="07195A"/>
+                <a:spcPct val="125000"/>
+              </a:lnSpc>
+              <a:buNone/>
+            </a:pPr>
+            <a:r>
+              <a:rPr lang="en-US" sz="900" dirty="0">
+                <a:solidFill>
+                  <a:srgbClr val="3D3A32"/>
                 </a:solidFill>
                 <a:latin typeface="Microsoft YaHei" pitchFamily="34" charset="0"/>
                 <a:ea typeface="Microsoft YaHei" pitchFamily="34" charset="-122"/>
                 <a:cs typeface="Microsoft YaHei" pitchFamily="34" charset="-120"/>
               </a:rPr>
-              <a:t>Lower Cost</a:t>
-            </a:r>
-            <a:endParaRPr lang="en-US" sz="2900" dirty="0"/>
-          </a:p>
-          <a:p>
-            <a:pPr algn="l" indent="0" marL="0">
-              <a:lnSpc>
-                <a:spcPct val="88000"/>
-              </a:lnSpc>
-              <a:buNone/>
-            </a:pPr>
-            <a:r>
-              <a:rPr lang="en-US" sz="2900" b="1" dirty="0">
-                <a:solidFill>
-                  <a:srgbClr val="07195A"/>
-                </a:solidFill>
-                <a:latin typeface="Microsoft YaHei" pitchFamily="34" charset="0"/>
-                <a:ea typeface="Microsoft YaHei" pitchFamily="34" charset="-122"/>
-                <a:cs typeface="Microsoft YaHei" pitchFamily="34" charset="-120"/>
-              </a:rPr>
-              <a:t>Raise Speed</a:t>
-            </a:r>
-            <a:endParaRPr lang="en-US" sz="2900" dirty="0"/>
-          </a:p>
-        </p:txBody>
-      </p:sp>
-      <p:sp>
-        <p:nvSpPr>
-          <p:cNvPr id="7" name="Shape 4"/>
-          <p:cNvSpPr/>
-          <p:nvPr/>
-        </p:nvSpPr>
-        <p:spPr>
-          <a:xfrm>
-            <a:off x="685800" y="3301898"/>
-            <a:ext cx="38405" cy="558698"/>
-          </a:xfrm>
-          <a:prstGeom prst="rect">
-            <a:avLst/>
-          </a:prstGeom>
-          <a:solidFill>
-            <a:srgbClr val="C51516"/>
-          </a:solidFill>
-          <a:ln/>
-        </p:spPr>
-      </p:sp>
-      <p:sp>
-        <p:nvSpPr>
-          <p:cNvPr id="8" name="Text 5"/>
-          <p:cNvSpPr/>
-          <p:nvPr/>
-        </p:nvSpPr>
-        <p:spPr>
-          <a:xfrm>
-            <a:off x="863194" y="3314700"/>
-            <a:ext cx="2667305" cy="470002"/>
-          </a:xfrm>
-          <a:prstGeom prst="rect">
-            <a:avLst/>
-          </a:prstGeom>
-          <a:noFill/>
-          <a:ln/>
-        </p:spPr>
-        <p:txBody>
-          <a:bodyPr wrap="square" lIns="0" tIns="0" rIns="0" bIns="0" rtlCol="0" anchor="t">
-            <a:normAutofit/>
-          </a:bodyPr>
-          <a:lstStyle/>
-          <a:p>
-            <a:pPr algn="l" indent="0" marL="0">
-              <a:lnSpc>
-                <a:spcPct val="125000"/>
-              </a:lnSpc>
-              <a:buNone/>
-            </a:pPr>
-            <a:r>
-              <a:rPr lang="en-US" sz="900" dirty="0">
-                <a:solidFill>
-                  <a:srgbClr val="3D3A32"/>
-                </a:solidFill>
-                <a:latin typeface="Microsoft YaHei" pitchFamily="34" charset="0"/>
-                <a:ea typeface="Microsoft YaHei" pitchFamily="34" charset="-122"/>
-                <a:cs typeface="Microsoft YaHei" pitchFamily="34" charset="-120"/>
-              </a:rPr>
               <a:t>Use the left side as the memory anchor and the right side for reusable evidence or actions.</a:t>
             </a:r>
             <a:endParaRPr lang="en-US" sz="900" dirty="0"/>
@@ -3202,7 +3429,7 @@
       </p:sp>
       <p:sp>
         <p:nvSpPr>
-          <p:cNvPr id="9" name="Shape 6"/>
+          <p:cNvPr id="10" name="Shape 6"/>
           <p:cNvSpPr/>
           <p:nvPr/>
         </p:nvSpPr>
@@ -3222,7 +3449,7 @@
       </p:sp>
       <p:sp>
         <p:nvSpPr>
-          <p:cNvPr id="10" name="Shape 7"/>
+          <p:cNvPr id="11" name="Shape 7"/>
           <p:cNvSpPr/>
           <p:nvPr/>
         </p:nvSpPr>
@@ -3256,7 +3483,7 @@
       </p:sp>
       <p:sp>
         <p:nvSpPr>
-          <p:cNvPr id="11" name="Shape 8"/>
+          <p:cNvPr id="12" name="Shape 8"/>
           <p:cNvSpPr/>
           <p:nvPr/>
         </p:nvSpPr>
@@ -3276,7 +3503,7 @@
       </p:sp>
       <p:sp>
         <p:nvSpPr>
-          <p:cNvPr id="12" name="Text 9"/>
+          <p:cNvPr id="13" name="Text 9"/>
           <p:cNvSpPr/>
           <p:nvPr/>
         </p:nvSpPr>
@@ -3320,7 +3547,7 @@
       </p:sp>
       <p:sp>
         <p:nvSpPr>
-          <p:cNvPr id="13" name="Text 10"/>
+          <p:cNvPr id="14" name="Text 10"/>
           <p:cNvSpPr/>
           <p:nvPr/>
         </p:nvSpPr>
@@ -3364,7 +3591,7 @@
       </p:sp>
       <p:sp>
         <p:nvSpPr>
-          <p:cNvPr id="14" name="Text 11"/>
+          <p:cNvPr id="15" name="Text 11"/>
           <p:cNvSpPr/>
           <p:nvPr/>
         </p:nvSpPr>
@@ -3408,7 +3635,7 @@
       </p:sp>
       <p:sp>
         <p:nvSpPr>
-          <p:cNvPr id="15" name="Shape 12"/>
+          <p:cNvPr id="16" name="Shape 12"/>
           <p:cNvSpPr/>
           <p:nvPr/>
         </p:nvSpPr>
@@ -3442,7 +3669,7 @@
       </p:sp>
       <p:sp>
         <p:nvSpPr>
-          <p:cNvPr id="16" name="Shape 13"/>
+          <p:cNvPr id="17" name="Shape 13"/>
           <p:cNvSpPr/>
           <p:nvPr/>
         </p:nvSpPr>
@@ -3462,7 +3689,7 @@
       </p:sp>
       <p:sp>
         <p:nvSpPr>
-          <p:cNvPr id="17" name="Text 14"/>
+          <p:cNvPr id="18" name="Text 14"/>
           <p:cNvSpPr/>
           <p:nvPr/>
         </p:nvSpPr>
@@ -3506,7 +3733,7 @@
       </p:sp>
       <p:sp>
         <p:nvSpPr>
-          <p:cNvPr id="18" name="Text 15"/>
+          <p:cNvPr id="19" name="Text 15"/>
           <p:cNvSpPr/>
           <p:nvPr/>
         </p:nvSpPr>
@@ -3550,7 +3777,7 @@
       </p:sp>
       <p:sp>
         <p:nvSpPr>
-          <p:cNvPr id="19" name="Text 16"/>
+          <p:cNvPr id="20" name="Text 16"/>
           <p:cNvSpPr/>
           <p:nvPr/>
         </p:nvSpPr>
@@ -3594,7 +3821,7 @@
       </p:sp>
       <p:sp>
         <p:nvSpPr>
-          <p:cNvPr id="20" name="Shape 17"/>
+          <p:cNvPr id="21" name="Shape 17"/>
           <p:cNvSpPr/>
           <p:nvPr/>
         </p:nvSpPr>
@@ -3628,7 +3855,7 @@
       </p:sp>
       <p:sp>
         <p:nvSpPr>
-          <p:cNvPr id="21" name="Shape 18"/>
+          <p:cNvPr id="22" name="Shape 18"/>
           <p:cNvSpPr/>
           <p:nvPr/>
         </p:nvSpPr>
@@ -3648,7 +3875,7 @@
       </p:sp>
       <p:sp>
         <p:nvSpPr>
-          <p:cNvPr id="22" name="Text 19"/>
+          <p:cNvPr id="23" name="Text 19"/>
           <p:cNvSpPr/>
           <p:nvPr/>
         </p:nvSpPr>
@@ -3692,7 +3919,7 @@
       </p:sp>
       <p:sp>
         <p:nvSpPr>
-          <p:cNvPr id="23" name="Text 20"/>
+          <p:cNvPr id="24" name="Text 20"/>
           <p:cNvSpPr/>
           <p:nvPr/>
         </p:nvSpPr>
@@ -3736,7 +3963,7 @@
       </p:sp>
       <p:sp>
         <p:nvSpPr>
-          <p:cNvPr id="24" name="Text 21"/>
+          <p:cNvPr id="25" name="Text 21"/>
           <p:cNvSpPr/>
           <p:nvPr/>
         </p:nvSpPr>
@@ -3780,7 +4007,7 @@
       </p:sp>
       <p:sp>
         <p:nvSpPr>
-          <p:cNvPr id="25" name="Shape 22"/>
+          <p:cNvPr id="26" name="Shape 22"/>
           <p:cNvSpPr/>
           <p:nvPr/>
         </p:nvSpPr>
@@ -3814,7 +4041,7 @@
       </p:sp>
       <p:sp>
         <p:nvSpPr>
-          <p:cNvPr id="26" name="Shape 23"/>
+          <p:cNvPr id="27" name="Shape 23"/>
           <p:cNvSpPr/>
           <p:nvPr/>
         </p:nvSpPr>
@@ -3834,7 +4061,7 @@
       </p:sp>
       <p:sp>
         <p:nvSpPr>
-          <p:cNvPr id="27" name="Text 24"/>
+          <p:cNvPr id="28" name="Text 24"/>
           <p:cNvSpPr/>
           <p:nvPr/>
         </p:nvSpPr>
@@ -3878,7 +4105,7 @@
       </p:sp>
       <p:sp>
         <p:nvSpPr>
-          <p:cNvPr id="28" name="Text 25"/>
+          <p:cNvPr id="29" name="Text 25"/>
           <p:cNvSpPr/>
           <p:nvPr/>
         </p:nvSpPr>
@@ -3922,7 +4149,7 @@
       </p:sp>
       <p:sp>
         <p:nvSpPr>
-          <p:cNvPr id="29" name="Text 26"/>
+          <p:cNvPr id="30" name="Text 26"/>
           <p:cNvSpPr/>
           <p:nvPr/>
         </p:nvSpPr>
@@ -3966,7 +4193,7 @@
       </p:sp>
       <p:sp>
         <p:nvSpPr>
-          <p:cNvPr id="30" name="Shape 27"/>
+          <p:cNvPr id="31" name="Shape 27"/>
           <p:cNvSpPr/>
           <p:nvPr/>
         </p:nvSpPr>
@@ -4025,7 +4252,7 @@
         <p:spPr>
           <a:xfrm>
             <a:off x="609905" y="457200"/>
-            <a:ext cx="9525305" cy="368503"/>
+            <a:ext cx="9905695" cy="368503"/>
           </a:xfrm>
           <a:prstGeom prst="rect">
             <a:avLst/>
@@ -4049,91 +4276,257 @@
               <a:rPr lang="en-US" sz="2000" b="1" dirty="0">
                 <a:solidFill>
                   <a:srgbClr val="C51516"/>
+                </a:solidFill>
+                <a:latin typeface="Century Gothic" pitchFamily="34" charset="0"/>
+                <a:ea typeface="Century Gothic" pitchFamily="34" charset="-122"/>
+                <a:cs typeface="Century Gothic" pitchFamily="34" charset="-120"/>
+              </a:rPr>
+              <a:t>Four-Column Mechanism</a:t>
+            </a:r>
+            <a:endParaRPr lang="en-US" sz="2000" dirty="0"/>
+          </a:p>
+        </p:txBody>
+      </p:sp>
+      <p:sp>
+        <p:nvSpPr>
+          <p:cNvPr id="4" name="Shape 1"/>
+          <p:cNvSpPr/>
+          <p:nvPr/>
+        </p:nvSpPr>
+        <p:spPr>
+          <a:xfrm>
+            <a:off x="609905" y="914400"/>
+            <a:ext cx="4826203" cy="19202"/>
+          </a:xfrm>
+          <a:prstGeom prst="rect">
+            <a:avLst/>
+          </a:prstGeom>
+          <a:solidFill>
+            <a:srgbClr val="C51516"/>
+          </a:solidFill>
+          <a:ln/>
+        </p:spPr>
+      </p:sp>
+      <p:sp>
+        <p:nvSpPr>
+          <p:cNvPr id="5" name="Text 2"/>
+          <p:cNvSpPr/>
+          <p:nvPr/>
+        </p:nvSpPr>
+        <p:spPr>
+          <a:xfrm>
+            <a:off x="609905" y="1041502"/>
+            <a:ext cx="9525305" cy="215798"/>
+          </a:xfrm>
+          <a:prstGeom prst="rect">
+            <a:avLst/>
+          </a:prstGeom>
+          <a:noFill/>
+          <a:ln/>
+        </p:spPr>
+        <p:txBody>
+          <a:bodyPr wrap="square" lIns="0" tIns="0" rIns="0" bIns="0" rtlCol="0" anchor="t">
+            <a:normAutofit/>
+          </a:bodyPr>
+          <a:lstStyle/>
+          <a:p>
+            <a:pPr algn="l" indent="0" marL="0">
+              <a:lnSpc>
+                <a:spcPct val="100000"/>
+              </a:lnSpc>
+              <a:buNone/>
+            </a:pPr>
+            <a:r>
+              <a:rPr lang="en-US" sz="900" dirty="0">
+                <a:solidFill>
+                  <a:srgbClr val="666666"/>
+                </a:solidFill>
+                <a:latin typeface="Century Gothic" pitchFamily="34" charset="0"/>
+                <a:ea typeface="Century Gothic" pitchFamily="34" charset="-122"/>
+                <a:cs typeface="Century Gothic" pitchFamily="34" charset="-120"/>
+              </a:rPr>
+              <a:t>For four values, four roles, four capabilities, or four process links.</a:t>
+            </a:r>
+            <a:endParaRPr lang="en-US" sz="900" dirty="0"/>
+          </a:p>
+        </p:txBody>
+      </p:sp>
+      <p:pic>
+        <p:nvPicPr>
+          <p:cNvPr id="6" name="Image 0" descr="theme/assets/logo-westwell.png">    </p:cNvPr>
+          <p:cNvPicPr>
+            <a:picLocks noChangeAspect="1"/>
+          </p:cNvPicPr>
+          <p:nvPr/>
+        </p:nvPicPr>
+        <p:blipFill>
+          <a:blip r:embed="rId1"/>
+          <a:stretch>
+            <a:fillRect/>
+          </a:stretch>
+        </p:blipFill>
+        <p:spPr>
+          <a:xfrm>
+            <a:off x="11162995" y="520294"/>
+            <a:ext cx="571500" cy="462686"/>
+          </a:xfrm>
+          <a:prstGeom prst="rect">
+            <a:avLst/>
+          </a:prstGeom>
+        </p:spPr>
+      </p:pic>
+      <p:sp>
+        <p:nvSpPr>
+          <p:cNvPr id="7" name="Shape 3"/>
+          <p:cNvSpPr/>
+          <p:nvPr/>
+        </p:nvSpPr>
+        <p:spPr>
+          <a:xfrm>
+            <a:off x="609905" y="1600200"/>
+            <a:ext cx="2609698" cy="3962095"/>
+          </a:xfrm>
+          <a:prstGeom prst="roundRect">
+            <a:avLst>
+              <a:gd name="adj" fmla="val 1962"/>
+            </a:avLst>
+          </a:prstGeom>
+          <a:solidFill>
+            <a:srgbClr val="FFFFFF"/>
+          </a:solidFill>
+          <a:ln w="12700">
+            <a:solidFill>
+              <a:srgbClr val="D9D5CB"/>
+            </a:solidFill>
+            <a:prstDash val="solid"/>
+          </a:ln>
+          <a:effectLst>
+            <a:outerShdw sx="100000" sy="100000" kx="0" ky="0" algn="bl" rotWithShape="0" blurRad="101600" dist="25400" dir="5400000">
+              <a:srgbClr val="1A2030">
+                <a:alpha val="14000"/>
+              </a:srgbClr>
+            </a:outerShdw>
+          </a:effectLst>
+        </p:spPr>
+      </p:sp>
+      <p:sp>
+        <p:nvSpPr>
+          <p:cNvPr id="8" name="Shape 4"/>
+          <p:cNvSpPr/>
+          <p:nvPr/>
+        </p:nvSpPr>
+        <p:spPr>
+          <a:xfrm>
+            <a:off x="609905" y="1600200"/>
+            <a:ext cx="2609698" cy="38405"/>
+          </a:xfrm>
+          <a:prstGeom prst="rect">
+            <a:avLst/>
+          </a:prstGeom>
+          <a:solidFill>
+            <a:srgbClr val="07195A"/>
+          </a:solidFill>
+          <a:ln/>
+        </p:spPr>
+      </p:sp>
+      <p:sp>
+        <p:nvSpPr>
+          <p:cNvPr id="9" name="Text 5"/>
+          <p:cNvSpPr/>
+          <p:nvPr/>
+        </p:nvSpPr>
+        <p:spPr>
+          <a:xfrm>
+            <a:off x="787298" y="1815998"/>
+            <a:ext cx="2253996" cy="139903"/>
+          </a:xfrm>
+          <a:prstGeom prst="rect">
+            <a:avLst/>
+          </a:prstGeom>
+          <a:noFill/>
+          <a:ln/>
+        </p:spPr>
+        <p:txBody>
+          <a:bodyPr wrap="square" lIns="0" tIns="0" rIns="0" bIns="0" rtlCol="0" anchor="t">
+            <a:normAutofit/>
+          </a:bodyPr>
+          <a:lstStyle/>
+          <a:p>
+            <a:pPr algn="l" indent="0" marL="0">
+              <a:lnSpc>
+                <a:spcPct val="100000"/>
+              </a:lnSpc>
+              <a:buNone/>
+            </a:pPr>
+            <a:r>
+              <a:rPr lang="en-US" sz="800" b="1" dirty="0">
+                <a:solidFill>
+                  <a:srgbClr val="A8A39A"/>
+                </a:solidFill>
+                <a:latin typeface="Century Gothic" pitchFamily="34" charset="0"/>
+                <a:ea typeface="Century Gothic" pitchFamily="34" charset="-122"/>
+                <a:cs typeface="Century Gothic" pitchFamily="34" charset="-120"/>
+              </a:rPr>
+              <a:t>01</a:t>
+            </a:r>
+            <a:endParaRPr lang="en-US" sz="800" dirty="0"/>
+          </a:p>
+        </p:txBody>
+      </p:sp>
+      <p:sp>
+        <p:nvSpPr>
+          <p:cNvPr id="10" name="Text 6"/>
+          <p:cNvSpPr/>
+          <p:nvPr/>
+        </p:nvSpPr>
+        <p:spPr>
+          <a:xfrm>
+            <a:off x="787298" y="2006194"/>
+            <a:ext cx="2253996" cy="215798"/>
+          </a:xfrm>
+          <a:prstGeom prst="rect">
+            <a:avLst/>
+          </a:prstGeom>
+          <a:noFill/>
+          <a:ln/>
+        </p:spPr>
+        <p:txBody>
+          <a:bodyPr wrap="square" lIns="0" tIns="0" rIns="0" bIns="0" rtlCol="0" anchor="t">
+            <a:normAutofit/>
+          </a:bodyPr>
+          <a:lstStyle/>
+          <a:p>
+            <a:pPr algn="l" indent="0" marL="0">
+              <a:lnSpc>
+                <a:spcPct val="100000"/>
+              </a:lnSpc>
+              <a:buNone/>
+            </a:pPr>
+            <a:r>
+              <a:rPr lang="en-US" sz="1200" b="1" dirty="0">
+                <a:solidFill>
+                  <a:srgbClr val="07195A"/>
                 </a:solidFill>
                 <a:latin typeface="Microsoft YaHei" pitchFamily="34" charset="0"/>
                 <a:ea typeface="Microsoft YaHei" pitchFamily="34" charset="-122"/>
                 <a:cs typeface="Microsoft YaHei" pitchFamily="34" charset="-120"/>
               </a:rPr>
-              <a:t>Four-Column Mechanism</a:t>
-            </a:r>
-            <a:endParaRPr lang="en-US" sz="2000" dirty="0"/>
-          </a:p>
-        </p:txBody>
-      </p:sp>
-      <p:sp>
-        <p:nvSpPr>
-          <p:cNvPr id="4" name="Shape 1"/>
-          <p:cNvSpPr/>
-          <p:nvPr/>
-        </p:nvSpPr>
-        <p:spPr>
-          <a:xfrm>
-            <a:off x="609905" y="914400"/>
-            <a:ext cx="4826203" cy="19202"/>
-          </a:xfrm>
-          <a:prstGeom prst="rect">
-            <a:avLst/>
-          </a:prstGeom>
-          <a:solidFill>
-            <a:srgbClr val="C51516"/>
-          </a:solidFill>
-          <a:ln/>
-        </p:spPr>
-      </p:sp>
-      <p:sp>
-        <p:nvSpPr>
-          <p:cNvPr id="5" name="Text 2"/>
-          <p:cNvSpPr/>
-          <p:nvPr/>
-        </p:nvSpPr>
-        <p:spPr>
-          <a:xfrm>
-            <a:off x="609905" y="1041502"/>
-            <a:ext cx="9778594" cy="215798"/>
-          </a:xfrm>
-          <a:prstGeom prst="rect">
-            <a:avLst/>
-          </a:prstGeom>
-          <a:noFill/>
-          <a:ln/>
-        </p:spPr>
-        <p:txBody>
-          <a:bodyPr wrap="square" lIns="0" tIns="0" rIns="0" bIns="0" rtlCol="0" anchor="t">
-            <a:normAutofit/>
-          </a:bodyPr>
-          <a:lstStyle/>
-          <a:p>
-            <a:pPr algn="l" indent="0" marL="0">
-              <a:lnSpc>
-                <a:spcPct val="100000"/>
-              </a:lnSpc>
-              <a:buNone/>
-            </a:pPr>
-            <a:r>
-              <a:rPr lang="en-US" sz="900" dirty="0">
-                <a:solidFill>
-                  <a:srgbClr val="666666"/>
-                </a:solidFill>
-                <a:latin typeface="Microsoft YaHei" pitchFamily="34" charset="0"/>
-                <a:ea typeface="Microsoft YaHei" pitchFamily="34" charset="-122"/>
-                <a:cs typeface="Microsoft YaHei" pitchFamily="34" charset="-120"/>
-              </a:rPr>
-              <a:t>For four values, four roles, four capabilities, or four process links.</a:t>
-            </a:r>
-            <a:endParaRPr lang="en-US" sz="900" dirty="0"/>
-          </a:p>
-        </p:txBody>
-      </p:sp>
-      <p:sp>
-        <p:nvSpPr>
-          <p:cNvPr id="6" name="Shape 3"/>
-          <p:cNvSpPr/>
-          <p:nvPr/>
-        </p:nvSpPr>
-        <p:spPr>
-          <a:xfrm>
-            <a:off x="609905" y="1574597"/>
-            <a:ext cx="267005" cy="267005"/>
+              <a:t>Operate</a:t>
+            </a:r>
+            <a:endParaRPr lang="en-US" sz="1200" dirty="0"/>
+          </a:p>
+        </p:txBody>
+      </p:sp>
+      <p:sp>
+        <p:nvSpPr>
+          <p:cNvPr id="11" name="Shape 7"/>
+          <p:cNvSpPr/>
+          <p:nvPr/>
+        </p:nvSpPr>
+        <p:spPr>
+          <a:xfrm>
+            <a:off x="787298" y="2311603"/>
+            <a:ext cx="457200" cy="32004"/>
           </a:xfrm>
           <a:prstGeom prst="rect">
             <a:avLst/>
@@ -4146,165 +4539,13 @@
       </p:sp>
       <p:sp>
         <p:nvSpPr>
-          <p:cNvPr id="7" name="Text 4"/>
-          <p:cNvSpPr/>
-          <p:nvPr/>
-        </p:nvSpPr>
-        <p:spPr>
-          <a:xfrm>
-            <a:off x="609905" y="1638605"/>
-            <a:ext cx="267005" cy="127102"/>
-          </a:xfrm>
-          <a:prstGeom prst="rect">
-            <a:avLst/>
-          </a:prstGeom>
-          <a:noFill/>
-          <a:ln/>
-        </p:spPr>
-        <p:txBody>
-          <a:bodyPr wrap="square" lIns="0" tIns="0" rIns="0" bIns="0" rtlCol="0" anchor="t">
-            <a:normAutofit/>
-          </a:bodyPr>
-          <a:lstStyle/>
-          <a:p>
-            <a:pPr algn="ctr" indent="0" marL="0">
-              <a:lnSpc>
-                <a:spcPct val="100000"/>
-              </a:lnSpc>
-              <a:buNone/>
-            </a:pPr>
-            <a:r>
-              <a:rPr lang="en-US" sz="800" b="1" dirty="0">
-                <a:solidFill>
-                  <a:srgbClr val="FFFFFF"/>
-                </a:solidFill>
-                <a:latin typeface="Century Gothic" pitchFamily="34" charset="0"/>
-                <a:ea typeface="Century Gothic" pitchFamily="34" charset="-122"/>
-                <a:cs typeface="Century Gothic" pitchFamily="34" charset="-120"/>
-              </a:rPr>
-              <a:t>01</a:t>
-            </a:r>
-            <a:endParaRPr lang="en-US" sz="800" dirty="0"/>
-          </a:p>
-        </p:txBody>
-      </p:sp>
-      <p:sp>
-        <p:nvSpPr>
-          <p:cNvPr id="8" name="Text 5"/>
-          <p:cNvSpPr/>
-          <p:nvPr/>
-        </p:nvSpPr>
-        <p:spPr>
-          <a:xfrm>
-            <a:off x="965606" y="1561795"/>
-            <a:ext cx="1904695" cy="190195"/>
-          </a:xfrm>
-          <a:prstGeom prst="rect">
-            <a:avLst/>
-          </a:prstGeom>
-          <a:noFill/>
-          <a:ln/>
-        </p:spPr>
-        <p:txBody>
-          <a:bodyPr wrap="square" lIns="0" tIns="0" rIns="0" bIns="0" rtlCol="0" anchor="t">
-            <a:normAutofit/>
-          </a:bodyPr>
-          <a:lstStyle/>
-          <a:p>
-            <a:pPr algn="l" indent="0" marL="0">
-              <a:lnSpc>
-                <a:spcPct val="100000"/>
-              </a:lnSpc>
-              <a:buNone/>
-            </a:pPr>
-            <a:r>
-              <a:rPr lang="en-US" sz="1100" b="1" dirty="0">
-                <a:solidFill>
-                  <a:srgbClr val="07195A"/>
-                </a:solidFill>
-                <a:latin typeface="Microsoft YaHei" pitchFamily="34" charset="0"/>
-                <a:ea typeface="Microsoft YaHei" pitchFamily="34" charset="-122"/>
-                <a:cs typeface="Microsoft YaHei" pitchFamily="34" charset="-120"/>
-              </a:rPr>
-              <a:t>Operate</a:t>
-            </a:r>
-            <a:endParaRPr lang="en-US" sz="1100" dirty="0"/>
-          </a:p>
-        </p:txBody>
-      </p:sp>
-      <p:sp>
-        <p:nvSpPr>
-          <p:cNvPr id="9" name="Shape 6"/>
-          <p:cNvSpPr/>
-          <p:nvPr/>
-        </p:nvSpPr>
-        <p:spPr>
-          <a:xfrm>
-            <a:off x="965606" y="1828800"/>
-            <a:ext cx="609905" cy="32004"/>
-          </a:xfrm>
-          <a:prstGeom prst="rect">
-            <a:avLst/>
-          </a:prstGeom>
-          <a:solidFill>
-            <a:srgbClr val="07195A"/>
-          </a:solidFill>
-          <a:ln/>
-        </p:spPr>
-      </p:sp>
-      <p:sp>
-        <p:nvSpPr>
-          <p:cNvPr id="10" name="Text 7"/>
-          <p:cNvSpPr/>
-          <p:nvPr/>
-        </p:nvSpPr>
-        <p:spPr>
-          <a:xfrm>
-            <a:off x="609905" y="2108606"/>
-            <a:ext cx="2222906" cy="470002"/>
-          </a:xfrm>
-          <a:prstGeom prst="rect">
-            <a:avLst/>
-          </a:prstGeom>
-          <a:noFill/>
-          <a:ln/>
-        </p:spPr>
-        <p:txBody>
-          <a:bodyPr wrap="square" lIns="0" tIns="0" rIns="0" bIns="0" rtlCol="0" anchor="t">
-            <a:normAutofit/>
-          </a:bodyPr>
-          <a:lstStyle/>
-          <a:p>
-            <a:pPr algn="l" indent="0" marL="0">
-              <a:lnSpc>
-                <a:spcPct val="125000"/>
-              </a:lnSpc>
-              <a:buNone/>
-            </a:pPr>
-            <a:r>
-              <a:rPr lang="en-US" sz="850" dirty="0">
-                <a:solidFill>
-                  <a:srgbClr val="3D3A32"/>
-                </a:solidFill>
-                <a:latin typeface="Microsoft YaHei" pitchFamily="34" charset="0"/>
-                <a:ea typeface="Microsoft YaHei" pitchFamily="34" charset="-122"/>
-                <a:cs typeface="Microsoft YaHei" pitchFamily="34" charset="-120"/>
-              </a:rPr>
-              <a:t>Connect metrics, process, and action.</a:t>
-            </a:r>
-            <a:endParaRPr lang="en-US" sz="850" dirty="0"/>
-          </a:p>
-        </p:txBody>
-      </p:sp>
-      <p:sp>
-        <p:nvSpPr>
-          <p:cNvPr id="11" name="Shape 8"/>
-          <p:cNvSpPr/>
-          <p:nvPr/>
-        </p:nvSpPr>
-        <p:spPr>
-          <a:xfrm>
-            <a:off x="1548994" y="3301898"/>
+          <p:cNvPr id="12" name="Shape 8"/>
+          <p:cNvSpPr/>
+          <p:nvPr/>
+        </p:nvSpPr>
+        <p:spPr>
+          <a:xfrm>
+            <a:off x="1749247" y="3226003"/>
             <a:ext cx="75895" cy="114300"/>
           </a:xfrm>
           <a:prstGeom prst="rect">
@@ -4323,13 +4564,13 @@
       </p:sp>
       <p:sp>
         <p:nvSpPr>
-          <p:cNvPr id="12" name="Shape 9"/>
-          <p:cNvSpPr/>
-          <p:nvPr/>
-        </p:nvSpPr>
-        <p:spPr>
-          <a:xfrm>
-            <a:off x="1676095" y="3213202"/>
+          <p:cNvPr id="13" name="Shape 9"/>
+          <p:cNvSpPr/>
+          <p:nvPr/>
+        </p:nvSpPr>
+        <p:spPr>
+          <a:xfrm>
+            <a:off x="1876349" y="3137306"/>
             <a:ext cx="75895" cy="202997"/>
           </a:xfrm>
           <a:prstGeom prst="rect">
@@ -4348,13 +4589,13 @@
       </p:sp>
       <p:sp>
         <p:nvSpPr>
-          <p:cNvPr id="13" name="Shape 10"/>
-          <p:cNvSpPr/>
-          <p:nvPr/>
-        </p:nvSpPr>
-        <p:spPr>
-          <a:xfrm>
-            <a:off x="1803197" y="3124505"/>
+          <p:cNvPr id="14" name="Shape 10"/>
+          <p:cNvSpPr/>
+          <p:nvPr/>
+        </p:nvSpPr>
+        <p:spPr>
+          <a:xfrm>
+            <a:off x="2003450" y="3047695"/>
             <a:ext cx="75895" cy="291694"/>
           </a:xfrm>
           <a:prstGeom prst="rect">
@@ -4373,13 +4614,13 @@
       </p:sp>
       <p:sp>
         <p:nvSpPr>
-          <p:cNvPr id="14" name="Shape 11"/>
-          <p:cNvSpPr/>
-          <p:nvPr/>
-        </p:nvSpPr>
-        <p:spPr>
-          <a:xfrm>
-            <a:off x="1498702" y="3416198"/>
+          <p:cNvPr id="15" name="Shape 11"/>
+          <p:cNvSpPr/>
+          <p:nvPr/>
+        </p:nvSpPr>
+        <p:spPr>
+          <a:xfrm>
+            <a:off x="1698955" y="3340303"/>
             <a:ext cx="431597" cy="0"/>
           </a:xfrm>
           <a:prstGeom prst="line">
@@ -4396,18 +4637,62 @@
       </p:sp>
       <p:sp>
         <p:nvSpPr>
-          <p:cNvPr id="15" name="Shape 12"/>
-          <p:cNvSpPr/>
-          <p:nvPr/>
-        </p:nvSpPr>
-        <p:spPr>
-          <a:xfrm>
-            <a:off x="914400" y="4114800"/>
-            <a:ext cx="1613002" cy="304495"/>
+          <p:cNvPr id="16" name="Text 12"/>
+          <p:cNvSpPr/>
+          <p:nvPr/>
+        </p:nvSpPr>
+        <p:spPr>
+          <a:xfrm>
+            <a:off x="787298" y="3720694"/>
+            <a:ext cx="2253996" cy="952805"/>
+          </a:xfrm>
+          <a:prstGeom prst="rect">
+            <a:avLst/>
+          </a:prstGeom>
+          <a:noFill/>
+          <a:ln/>
+        </p:spPr>
+        <p:txBody>
+          <a:bodyPr wrap="square" lIns="0" tIns="0" rIns="0" bIns="0" rtlCol="0" anchor="t">
+            <a:normAutofit/>
+          </a:bodyPr>
+          <a:lstStyle/>
+          <a:p>
+            <a:pPr algn="l" indent="0" marL="0">
+              <a:lnSpc>
+                <a:spcPct val="142000"/>
+              </a:lnSpc>
+              <a:buNone/>
+            </a:pPr>
+            <a:r>
+              <a:rPr lang="en-US" sz="850" dirty="0">
+                <a:solidFill>
+                  <a:srgbClr val="3D3A32"/>
+                </a:solidFill>
+                <a:latin typeface="Microsoft YaHei" pitchFamily="34" charset="0"/>
+                <a:ea typeface="Microsoft YaHei" pitchFamily="34" charset="-122"/>
+                <a:cs typeface="Microsoft YaHei" pitchFamily="34" charset="-120"/>
+              </a:rPr>
+              <a:t>Connect metrics, process, and action.</a:t>
+            </a:r>
+            <a:endParaRPr lang="en-US" sz="850" dirty="0"/>
+          </a:p>
+        </p:txBody>
+      </p:sp>
+      <p:sp>
+        <p:nvSpPr>
+          <p:cNvPr id="17" name="Shape 13"/>
+          <p:cNvSpPr/>
+          <p:nvPr/>
+        </p:nvSpPr>
+        <p:spPr>
+          <a:xfrm>
+            <a:off x="787298" y="5067605"/>
+            <a:ext cx="2253996" cy="342900"/>
           </a:xfrm>
           <a:prstGeom prst="roundRect">
             <a:avLst>
-              <a:gd name="adj" fmla="val 16817"/>
+              <a:gd name="adj" fmla="val 14933"/>
             </a:avLst>
           </a:prstGeom>
           <a:solidFill>
@@ -4423,14 +4708,14 @@
       </p:sp>
       <p:sp>
         <p:nvSpPr>
-          <p:cNvPr id="16" name="Text 13"/>
-          <p:cNvSpPr/>
-          <p:nvPr/>
-        </p:nvSpPr>
-        <p:spPr>
-          <a:xfrm>
-            <a:off x="914400" y="4177894"/>
-            <a:ext cx="1613002" cy="165506"/>
+          <p:cNvPr id="18" name="Text 14"/>
+          <p:cNvSpPr/>
+          <p:nvPr/>
+        </p:nvSpPr>
+        <p:spPr>
+          <a:xfrm>
+            <a:off x="787298" y="5149901"/>
+            <a:ext cx="2253996" cy="177394"/>
           </a:xfrm>
           <a:prstGeom prst="rect">
             <a:avLst/>
@@ -4467,68 +4752,82 @@
       </p:sp>
       <p:sp>
         <p:nvSpPr>
-          <p:cNvPr id="17" name="Shape 14"/>
-          <p:cNvSpPr/>
-          <p:nvPr/>
-        </p:nvSpPr>
-        <p:spPr>
-          <a:xfrm>
-            <a:off x="3174797" y="1524305"/>
-            <a:ext cx="6401" cy="3301898"/>
-          </a:xfrm>
-          <a:prstGeom prst="rect">
-            <a:avLst/>
-          </a:prstGeom>
-          <a:solidFill>
-            <a:srgbClr val="D9D5CB"/>
-          </a:solidFill>
-          <a:ln/>
-        </p:spPr>
-      </p:sp>
-      <p:sp>
-        <p:nvSpPr>
-          <p:cNvPr id="18" name="Shape 15"/>
-          <p:cNvSpPr/>
-          <p:nvPr/>
-        </p:nvSpPr>
-        <p:spPr>
-          <a:xfrm>
-            <a:off x="3353105" y="1574597"/>
-            <a:ext cx="267005" cy="267005"/>
-          </a:xfrm>
-          <a:prstGeom prst="rect">
-            <a:avLst/>
-          </a:prstGeom>
-          <a:solidFill>
-            <a:srgbClr val="C51516"/>
-          </a:solidFill>
-          <a:ln/>
-        </p:spPr>
-      </p:sp>
-      <p:sp>
-        <p:nvSpPr>
-          <p:cNvPr id="19" name="Text 16"/>
-          <p:cNvSpPr/>
-          <p:nvPr/>
-        </p:nvSpPr>
-        <p:spPr>
-          <a:xfrm>
-            <a:off x="3353105" y="1638605"/>
-            <a:ext cx="267005" cy="127102"/>
-          </a:xfrm>
-          <a:prstGeom prst="rect">
-            <a:avLst/>
-          </a:prstGeom>
-          <a:noFill/>
-          <a:ln/>
-        </p:spPr>
-        <p:txBody>
-          <a:bodyPr wrap="square" lIns="0" tIns="0" rIns="0" bIns="0" rtlCol="0" anchor="t">
-            <a:normAutofit/>
-          </a:bodyPr>
-          <a:lstStyle/>
-          <a:p>
-            <a:pPr algn="ctr" indent="0" marL="0">
+          <p:cNvPr id="19" name="Shape 15"/>
+          <p:cNvSpPr/>
+          <p:nvPr/>
+        </p:nvSpPr>
+        <p:spPr>
+          <a:xfrm>
+            <a:off x="3396996" y="1600200"/>
+            <a:ext cx="2609698" cy="3962095"/>
+          </a:xfrm>
+          <a:prstGeom prst="roundRect">
+            <a:avLst>
+              <a:gd name="adj" fmla="val 1962"/>
+            </a:avLst>
+          </a:prstGeom>
+          <a:solidFill>
+            <a:srgbClr val="FFFFFF"/>
+          </a:solidFill>
+          <a:ln w="12700">
+            <a:solidFill>
+              <a:srgbClr val="D9D5CB"/>
+            </a:solidFill>
+            <a:prstDash val="solid"/>
+          </a:ln>
+          <a:effectLst>
+            <a:outerShdw sx="100000" sy="100000" kx="0" ky="0" algn="bl" rotWithShape="0" blurRad="101600" dist="25400" dir="5400000">
+              <a:srgbClr val="1A2030">
+                <a:alpha val="14000"/>
+              </a:srgbClr>
+            </a:outerShdw>
+          </a:effectLst>
+        </p:spPr>
+      </p:sp>
+      <p:sp>
+        <p:nvSpPr>
+          <p:cNvPr id="20" name="Shape 16"/>
+          <p:cNvSpPr/>
+          <p:nvPr/>
+        </p:nvSpPr>
+        <p:spPr>
+          <a:xfrm>
+            <a:off x="3396996" y="1600200"/>
+            <a:ext cx="2609698" cy="38405"/>
+          </a:xfrm>
+          <a:prstGeom prst="rect">
+            <a:avLst/>
+          </a:prstGeom>
+          <a:solidFill>
+            <a:srgbClr val="07195A"/>
+          </a:solidFill>
+          <a:ln/>
+        </p:spPr>
+      </p:sp>
+      <p:sp>
+        <p:nvSpPr>
+          <p:cNvPr id="21" name="Text 17"/>
+          <p:cNvSpPr/>
+          <p:nvPr/>
+        </p:nvSpPr>
+        <p:spPr>
+          <a:xfrm>
+            <a:off x="3575304" y="1815998"/>
+            <a:ext cx="2253996" cy="139903"/>
+          </a:xfrm>
+          <a:prstGeom prst="rect">
+            <a:avLst/>
+          </a:prstGeom>
+          <a:noFill/>
+          <a:ln/>
+        </p:spPr>
+        <p:txBody>
+          <a:bodyPr wrap="square" lIns="0" tIns="0" rIns="0" bIns="0" rtlCol="0" anchor="t">
+            <a:normAutofit/>
+          </a:bodyPr>
+          <a:lstStyle/>
+          <a:p>
+            <a:pPr algn="l" indent="0" marL="0">
               <a:lnSpc>
                 <a:spcPct val="100000"/>
               </a:lnSpc>
@@ -4537,7 +4836,7 @@
             <a:r>
               <a:rPr lang="en-US" sz="800" b="1" dirty="0">
                 <a:solidFill>
-                  <a:srgbClr val="FFFFFF"/>
+                  <a:srgbClr val="A8A39A"/>
                 </a:solidFill>
                 <a:latin typeface="Century Gothic" pitchFamily="34" charset="0"/>
                 <a:ea typeface="Century Gothic" pitchFamily="34" charset="-122"/>
@@ -4551,14 +4850,14 @@
       </p:sp>
       <p:sp>
         <p:nvSpPr>
-          <p:cNvPr id="20" name="Text 17"/>
-          <p:cNvSpPr/>
-          <p:nvPr/>
-        </p:nvSpPr>
-        <p:spPr>
-          <a:xfrm>
-            <a:off x="3708806" y="1561795"/>
-            <a:ext cx="1904695" cy="190195"/>
+          <p:cNvPr id="22" name="Text 18"/>
+          <p:cNvSpPr/>
+          <p:nvPr/>
+        </p:nvSpPr>
+        <p:spPr>
+          <a:xfrm>
+            <a:off x="3575304" y="2006194"/>
+            <a:ext cx="2253996" cy="215798"/>
           </a:xfrm>
           <a:prstGeom prst="rect">
             <a:avLst/>
@@ -4579,9 +4878,9 @@
               <a:buNone/>
             </a:pPr>
             <a:r>
-              <a:rPr lang="en-US" sz="1100" b="1" dirty="0">
-                <a:solidFill>
-                  <a:srgbClr val="C51516"/>
+              <a:rPr lang="en-US" sz="1200" b="1" dirty="0">
+                <a:solidFill>
+                  <a:srgbClr val="07195A"/>
                 </a:solidFill>
                 <a:latin typeface="Microsoft YaHei" pitchFamily="34" charset="0"/>
                 <a:ea typeface="Microsoft YaHei" pitchFamily="34" charset="-122"/>
@@ -4589,83 +4888,39 @@
               </a:rPr>
               <a:t>Govern</a:t>
             </a:r>
-            <a:endParaRPr lang="en-US" sz="1100" dirty="0"/>
-          </a:p>
-        </p:txBody>
-      </p:sp>
-      <p:sp>
-        <p:nvSpPr>
-          <p:cNvPr id="21" name="Shape 18"/>
-          <p:cNvSpPr/>
-          <p:nvPr/>
-        </p:nvSpPr>
-        <p:spPr>
-          <a:xfrm>
-            <a:off x="3708806" y="1828800"/>
-            <a:ext cx="609905" cy="32004"/>
-          </a:xfrm>
-          <a:prstGeom prst="rect">
-            <a:avLst/>
-          </a:prstGeom>
-          <a:solidFill>
-            <a:srgbClr val="C51516"/>
-          </a:solidFill>
-          <a:ln/>
-        </p:spPr>
-      </p:sp>
-      <p:sp>
-        <p:nvSpPr>
-          <p:cNvPr id="22" name="Text 19"/>
-          <p:cNvSpPr/>
-          <p:nvPr/>
-        </p:nvSpPr>
-        <p:spPr>
-          <a:xfrm>
-            <a:off x="3353105" y="2108606"/>
-            <a:ext cx="2222906" cy="470002"/>
-          </a:xfrm>
-          <a:prstGeom prst="rect">
-            <a:avLst/>
-          </a:prstGeom>
-          <a:noFill/>
-          <a:ln/>
-        </p:spPr>
-        <p:txBody>
-          <a:bodyPr wrap="square" lIns="0" tIns="0" rIns="0" bIns="0" rtlCol="0" anchor="t">
-            <a:normAutofit/>
-          </a:bodyPr>
-          <a:lstStyle/>
-          <a:p>
-            <a:pPr algn="l" indent="0" marL="0">
-              <a:lnSpc>
-                <a:spcPct val="125000"/>
-              </a:lnSpc>
-              <a:buNone/>
-            </a:pPr>
-            <a:r>
-              <a:rPr lang="en-US" sz="850" dirty="0">
-                <a:solidFill>
-                  <a:srgbClr val="3D3A32"/>
-                </a:solidFill>
-                <a:latin typeface="Microsoft YaHei" pitchFamily="34" charset="0"/>
-                <a:ea typeface="Microsoft YaHei" pitchFamily="34" charset="-122"/>
-                <a:cs typeface="Microsoft YaHei" pitchFamily="34" charset="-120"/>
-              </a:rPr>
-              <a:t>Close the loop from issue to solution.</a:t>
-            </a:r>
-            <a:endParaRPr lang="en-US" sz="850" dirty="0"/>
-          </a:p>
-        </p:txBody>
-      </p:sp>
-      <p:sp>
-        <p:nvSpPr>
-          <p:cNvPr id="23" name="Shape 20"/>
+            <a:endParaRPr lang="en-US" sz="1200" dirty="0"/>
+          </a:p>
+        </p:txBody>
+      </p:sp>
+      <p:sp>
+        <p:nvSpPr>
+          <p:cNvPr id="23" name="Shape 19"/>
+          <p:cNvSpPr/>
+          <p:nvPr/>
+        </p:nvSpPr>
+        <p:spPr>
+          <a:xfrm>
+            <a:off x="3575304" y="2311603"/>
+            <a:ext cx="457200" cy="32004"/>
+          </a:xfrm>
+          <a:prstGeom prst="rect">
+            <a:avLst/>
+          </a:prstGeom>
+          <a:solidFill>
+            <a:srgbClr val="07195A"/>
+          </a:solidFill>
+          <a:ln/>
+        </p:spPr>
+      </p:sp>
+      <p:sp>
+        <p:nvSpPr>
+          <p:cNvPr id="24" name="Shape 20"/>
           <p:cNvSpPr/>
           <p:nvPr/>
         </p:nvSpPr>
         <p:spPr>
           <a:xfrm flipV="1">
-            <a:off x="4267505" y="3124505"/>
+            <a:off x="4511650" y="3047695"/>
             <a:ext cx="342900" cy="267005"/>
           </a:xfrm>
           <a:prstGeom prst="line">
@@ -4674,7 +4929,7 @@
           <a:noFill/>
           <a:ln w="17780">
             <a:solidFill>
-              <a:srgbClr val="C51516"/>
+              <a:srgbClr val="07195A"/>
             </a:solidFill>
             <a:prstDash val="solid"/>
             <a:tailEnd type="triangle"/>
@@ -4683,320 +4938,14 @@
       </p:sp>
       <p:sp>
         <p:nvSpPr>
-          <p:cNvPr id="24" name="Shape 21"/>
-          <p:cNvSpPr/>
-          <p:nvPr/>
-        </p:nvSpPr>
-        <p:spPr>
-          <a:xfrm>
-            <a:off x="4267505" y="3390595"/>
+          <p:cNvPr id="25" name="Shape 21"/>
+          <p:cNvSpPr/>
+          <p:nvPr/>
+        </p:nvSpPr>
+        <p:spPr>
+          <a:xfrm>
+            <a:off x="4511650" y="3314700"/>
             <a:ext cx="381305" cy="0"/>
-          </a:xfrm>
-          <a:prstGeom prst="line">
-            <a:avLst/>
-          </a:prstGeom>
-          <a:noFill/>
-          <a:ln w="17780">
-            <a:solidFill>
-              <a:srgbClr val="C51516"/>
-            </a:solidFill>
-            <a:prstDash val="solid"/>
-          </a:ln>
-        </p:spPr>
-      </p:sp>
-      <p:sp>
-        <p:nvSpPr>
-          <p:cNvPr id="25" name="Shape 22"/>
-          <p:cNvSpPr/>
-          <p:nvPr/>
-        </p:nvSpPr>
-        <p:spPr>
-          <a:xfrm>
-            <a:off x="3657600" y="4114800"/>
-            <a:ext cx="1613002" cy="304495"/>
-          </a:xfrm>
-          <a:prstGeom prst="roundRect">
-            <a:avLst>
-              <a:gd name="adj" fmla="val 16817"/>
-            </a:avLst>
-          </a:prstGeom>
-          <a:solidFill>
-            <a:srgbClr val="FBECEB"/>
-          </a:solidFill>
-          <a:ln w="12700">
-            <a:solidFill>
-              <a:srgbClr val="C51516"/>
-            </a:solidFill>
-            <a:prstDash val="solid"/>
-          </a:ln>
-        </p:spPr>
-      </p:sp>
-      <p:sp>
-        <p:nvSpPr>
-          <p:cNvPr id="26" name="Text 23"/>
-          <p:cNvSpPr/>
-          <p:nvPr/>
-        </p:nvSpPr>
-        <p:spPr>
-          <a:xfrm>
-            <a:off x="3657600" y="4177894"/>
-            <a:ext cx="1613002" cy="165506"/>
-          </a:xfrm>
-          <a:prstGeom prst="rect">
-            <a:avLst/>
-          </a:prstGeom>
-          <a:noFill/>
-          <a:ln/>
-        </p:spPr>
-        <p:txBody>
-          <a:bodyPr wrap="square" lIns="0" tIns="0" rIns="0" bIns="0" rtlCol="0" anchor="t">
-            <a:normAutofit/>
-          </a:bodyPr>
-          <a:lstStyle/>
-          <a:p>
-            <a:pPr algn="ctr" indent="0" marL="0">
-              <a:lnSpc>
-                <a:spcPct val="100000"/>
-              </a:lnSpc>
-              <a:buNone/>
-            </a:pPr>
-            <a:r>
-              <a:rPr lang="en-US" sz="850" b="1" dirty="0">
-                <a:solidFill>
-                  <a:srgbClr val="C51516"/>
-                </a:solidFill>
-                <a:latin typeface="Microsoft YaHei" pitchFamily="34" charset="0"/>
-                <a:ea typeface="Microsoft YaHei" pitchFamily="34" charset="-122"/>
-                <a:cs typeface="Microsoft YaHei" pitchFamily="34" charset="-120"/>
-              </a:rPr>
-              <a:t>Closed Loop</a:t>
-            </a:r>
-            <a:endParaRPr lang="en-US" sz="850" dirty="0"/>
-          </a:p>
-        </p:txBody>
-      </p:sp>
-      <p:sp>
-        <p:nvSpPr>
-          <p:cNvPr id="27" name="Shape 24"/>
-          <p:cNvSpPr/>
-          <p:nvPr/>
-        </p:nvSpPr>
-        <p:spPr>
-          <a:xfrm>
-            <a:off x="5917997" y="1524305"/>
-            <a:ext cx="6401" cy="3301898"/>
-          </a:xfrm>
-          <a:prstGeom prst="rect">
-            <a:avLst/>
-          </a:prstGeom>
-          <a:solidFill>
-            <a:srgbClr val="D9D5CB"/>
-          </a:solidFill>
-          <a:ln/>
-        </p:spPr>
-      </p:sp>
-      <p:sp>
-        <p:nvSpPr>
-          <p:cNvPr id="28" name="Shape 25"/>
-          <p:cNvSpPr/>
-          <p:nvPr/>
-        </p:nvSpPr>
-        <p:spPr>
-          <a:xfrm>
-            <a:off x="6096305" y="1574597"/>
-            <a:ext cx="267005" cy="267005"/>
-          </a:xfrm>
-          <a:prstGeom prst="rect">
-            <a:avLst/>
-          </a:prstGeom>
-          <a:solidFill>
-            <a:srgbClr val="07195A"/>
-          </a:solidFill>
-          <a:ln/>
-        </p:spPr>
-      </p:sp>
-      <p:sp>
-        <p:nvSpPr>
-          <p:cNvPr id="29" name="Text 26"/>
-          <p:cNvSpPr/>
-          <p:nvPr/>
-        </p:nvSpPr>
-        <p:spPr>
-          <a:xfrm>
-            <a:off x="6096305" y="1638605"/>
-            <a:ext cx="267005" cy="127102"/>
-          </a:xfrm>
-          <a:prstGeom prst="rect">
-            <a:avLst/>
-          </a:prstGeom>
-          <a:noFill/>
-          <a:ln/>
-        </p:spPr>
-        <p:txBody>
-          <a:bodyPr wrap="square" lIns="0" tIns="0" rIns="0" bIns="0" rtlCol="0" anchor="t">
-            <a:normAutofit/>
-          </a:bodyPr>
-          <a:lstStyle/>
-          <a:p>
-            <a:pPr algn="ctr" indent="0" marL="0">
-              <a:lnSpc>
-                <a:spcPct val="100000"/>
-              </a:lnSpc>
-              <a:buNone/>
-            </a:pPr>
-            <a:r>
-              <a:rPr lang="en-US" sz="800" b="1" dirty="0">
-                <a:solidFill>
-                  <a:srgbClr val="FFFFFF"/>
-                </a:solidFill>
-                <a:latin typeface="Century Gothic" pitchFamily="34" charset="0"/>
-                <a:ea typeface="Century Gothic" pitchFamily="34" charset="-122"/>
-                <a:cs typeface="Century Gothic" pitchFamily="34" charset="-120"/>
-              </a:rPr>
-              <a:t>03</a:t>
-            </a:r>
-            <a:endParaRPr lang="en-US" sz="800" dirty="0"/>
-          </a:p>
-        </p:txBody>
-      </p:sp>
-      <p:sp>
-        <p:nvSpPr>
-          <p:cNvPr id="30" name="Text 27"/>
-          <p:cNvSpPr/>
-          <p:nvPr/>
-        </p:nvSpPr>
-        <p:spPr>
-          <a:xfrm>
-            <a:off x="6452006" y="1561795"/>
-            <a:ext cx="1904695" cy="190195"/>
-          </a:xfrm>
-          <a:prstGeom prst="rect">
-            <a:avLst/>
-          </a:prstGeom>
-          <a:noFill/>
-          <a:ln/>
-        </p:spPr>
-        <p:txBody>
-          <a:bodyPr wrap="square" lIns="0" tIns="0" rIns="0" bIns="0" rtlCol="0" anchor="t">
-            <a:normAutofit/>
-          </a:bodyPr>
-          <a:lstStyle/>
-          <a:p>
-            <a:pPr algn="l" indent="0" marL="0">
-              <a:lnSpc>
-                <a:spcPct val="100000"/>
-              </a:lnSpc>
-              <a:buNone/>
-            </a:pPr>
-            <a:r>
-              <a:rPr lang="en-US" sz="1100" b="1" dirty="0">
-                <a:solidFill>
-                  <a:srgbClr val="07195A"/>
-                </a:solidFill>
-                <a:latin typeface="Microsoft YaHei" pitchFamily="34" charset="0"/>
-                <a:ea typeface="Microsoft YaHei" pitchFamily="34" charset="-122"/>
-                <a:cs typeface="Microsoft YaHei" pitchFamily="34" charset="-120"/>
-              </a:rPr>
-              <a:t>Assetize</a:t>
-            </a:r>
-            <a:endParaRPr lang="en-US" sz="1100" dirty="0"/>
-          </a:p>
-        </p:txBody>
-      </p:sp>
-      <p:sp>
-        <p:nvSpPr>
-          <p:cNvPr id="31" name="Shape 28"/>
-          <p:cNvSpPr/>
-          <p:nvPr/>
-        </p:nvSpPr>
-        <p:spPr>
-          <a:xfrm>
-            <a:off x="6452006" y="1828800"/>
-            <a:ext cx="609905" cy="32004"/>
-          </a:xfrm>
-          <a:prstGeom prst="rect">
-            <a:avLst/>
-          </a:prstGeom>
-          <a:solidFill>
-            <a:srgbClr val="07195A"/>
-          </a:solidFill>
-          <a:ln/>
-        </p:spPr>
-      </p:sp>
-      <p:sp>
-        <p:nvSpPr>
-          <p:cNvPr id="32" name="Text 29"/>
-          <p:cNvSpPr/>
-          <p:nvPr/>
-        </p:nvSpPr>
-        <p:spPr>
-          <a:xfrm>
-            <a:off x="6096305" y="2108606"/>
-            <a:ext cx="2222906" cy="470002"/>
-          </a:xfrm>
-          <a:prstGeom prst="rect">
-            <a:avLst/>
-          </a:prstGeom>
-          <a:noFill/>
-          <a:ln/>
-        </p:spPr>
-        <p:txBody>
-          <a:bodyPr wrap="square" lIns="0" tIns="0" rIns="0" bIns="0" rtlCol="0" anchor="t">
-            <a:normAutofit/>
-          </a:bodyPr>
-          <a:lstStyle/>
-          <a:p>
-            <a:pPr algn="l" indent="0" marL="0">
-              <a:lnSpc>
-                <a:spcPct val="125000"/>
-              </a:lnSpc>
-              <a:buNone/>
-            </a:pPr>
-            <a:r>
-              <a:rPr lang="en-US" sz="850" dirty="0">
-                <a:solidFill>
-                  <a:srgbClr val="3D3A32"/>
-                </a:solidFill>
-                <a:latin typeface="Microsoft YaHei" pitchFamily="34" charset="0"/>
-                <a:ea typeface="Microsoft YaHei" pitchFamily="34" charset="-122"/>
-                <a:cs typeface="Microsoft YaHei" pitchFamily="34" charset="-120"/>
-              </a:rPr>
-              <a:t>Turn one-off experience into reusable knowledge.</a:t>
-            </a:r>
-            <a:endParaRPr lang="en-US" sz="850" dirty="0"/>
-          </a:p>
-        </p:txBody>
-      </p:sp>
-      <p:sp>
-        <p:nvSpPr>
-          <p:cNvPr id="33" name="Shape 30"/>
-          <p:cNvSpPr/>
-          <p:nvPr/>
-        </p:nvSpPr>
-        <p:spPr>
-          <a:xfrm>
-            <a:off x="7099402" y="3161995"/>
-            <a:ext cx="202997" cy="202997"/>
-          </a:xfrm>
-          <a:prstGeom prst="ellipse">
-            <a:avLst/>
-          </a:prstGeom>
-          <a:solidFill>
-            <a:srgbClr val="07195A"/>
-          </a:solidFill>
-          <a:ln/>
-        </p:spPr>
-      </p:sp>
-      <p:sp>
-        <p:nvSpPr>
-          <p:cNvPr id="34" name="Shape 31"/>
-          <p:cNvSpPr/>
-          <p:nvPr/>
-        </p:nvSpPr>
-        <p:spPr>
-          <a:xfrm flipH="1" flipV="1">
-            <a:off x="6933895" y="3060497"/>
-            <a:ext cx="267005" cy="202997"/>
           </a:xfrm>
           <a:prstGeom prst="line">
             <a:avLst/>
@@ -5012,21 +4961,316 @@
       </p:sp>
       <p:sp>
         <p:nvSpPr>
-          <p:cNvPr id="35" name="Shape 32"/>
-          <p:cNvSpPr/>
-          <p:nvPr/>
-        </p:nvSpPr>
-        <p:spPr>
-          <a:xfrm>
-            <a:off x="6883603" y="3010205"/>
-            <a:ext cx="101498" cy="101498"/>
+          <p:cNvPr id="26" name="Text 22"/>
+          <p:cNvSpPr/>
+          <p:nvPr/>
+        </p:nvSpPr>
+        <p:spPr>
+          <a:xfrm>
+            <a:off x="3575304" y="3720694"/>
+            <a:ext cx="2253996" cy="952805"/>
+          </a:xfrm>
+          <a:prstGeom prst="rect">
+            <a:avLst/>
+          </a:prstGeom>
+          <a:noFill/>
+          <a:ln/>
+        </p:spPr>
+        <p:txBody>
+          <a:bodyPr wrap="square" lIns="0" tIns="0" rIns="0" bIns="0" rtlCol="0" anchor="t">
+            <a:normAutofit/>
+          </a:bodyPr>
+          <a:lstStyle/>
+          <a:p>
+            <a:pPr algn="l" indent="0" marL="0">
+              <a:lnSpc>
+                <a:spcPct val="142000"/>
+              </a:lnSpc>
+              <a:buNone/>
+            </a:pPr>
+            <a:r>
+              <a:rPr lang="en-US" sz="850" dirty="0">
+                <a:solidFill>
+                  <a:srgbClr val="3D3A32"/>
+                </a:solidFill>
+                <a:latin typeface="Microsoft YaHei" pitchFamily="34" charset="0"/>
+                <a:ea typeface="Microsoft YaHei" pitchFamily="34" charset="-122"/>
+                <a:cs typeface="Microsoft YaHei" pitchFamily="34" charset="-120"/>
+              </a:rPr>
+              <a:t>Close the loop from issue to solution.</a:t>
+            </a:r>
+            <a:endParaRPr lang="en-US" sz="850" dirty="0"/>
+          </a:p>
+        </p:txBody>
+      </p:sp>
+      <p:sp>
+        <p:nvSpPr>
+          <p:cNvPr id="27" name="Shape 23"/>
+          <p:cNvSpPr/>
+          <p:nvPr/>
+        </p:nvSpPr>
+        <p:spPr>
+          <a:xfrm>
+            <a:off x="3575304" y="5067605"/>
+            <a:ext cx="2253996" cy="342900"/>
+          </a:xfrm>
+          <a:prstGeom prst="roundRect">
+            <a:avLst>
+              <a:gd name="adj" fmla="val 14933"/>
+            </a:avLst>
+          </a:prstGeom>
+          <a:solidFill>
+            <a:srgbClr val="F3F6FA"/>
+          </a:solidFill>
+          <a:ln w="12700">
+            <a:solidFill>
+              <a:srgbClr val="D9D5CB"/>
+            </a:solidFill>
+            <a:prstDash val="solid"/>
+          </a:ln>
+        </p:spPr>
+      </p:sp>
+      <p:sp>
+        <p:nvSpPr>
+          <p:cNvPr id="28" name="Text 24"/>
+          <p:cNvSpPr/>
+          <p:nvPr/>
+        </p:nvSpPr>
+        <p:spPr>
+          <a:xfrm>
+            <a:off x="3575304" y="5149901"/>
+            <a:ext cx="2253996" cy="177394"/>
+          </a:xfrm>
+          <a:prstGeom prst="rect">
+            <a:avLst/>
+          </a:prstGeom>
+          <a:noFill/>
+          <a:ln/>
+        </p:spPr>
+        <p:txBody>
+          <a:bodyPr wrap="square" lIns="0" tIns="0" rIns="0" bIns="0" rtlCol="0" anchor="t">
+            <a:normAutofit/>
+          </a:bodyPr>
+          <a:lstStyle/>
+          <a:p>
+            <a:pPr algn="ctr" indent="0" marL="0">
+              <a:lnSpc>
+                <a:spcPct val="100000"/>
+              </a:lnSpc>
+              <a:buNone/>
+            </a:pPr>
+            <a:r>
+              <a:rPr lang="en-US" sz="850" b="1" dirty="0">
+                <a:solidFill>
+                  <a:srgbClr val="07195A"/>
+                </a:solidFill>
+                <a:latin typeface="Microsoft YaHei" pitchFamily="34" charset="0"/>
+                <a:ea typeface="Microsoft YaHei" pitchFamily="34" charset="-122"/>
+                <a:cs typeface="Microsoft YaHei" pitchFamily="34" charset="-120"/>
+              </a:rPr>
+              <a:t>Closed Loop</a:t>
+            </a:r>
+            <a:endParaRPr lang="en-US" sz="850" dirty="0"/>
+          </a:p>
+        </p:txBody>
+      </p:sp>
+      <p:sp>
+        <p:nvSpPr>
+          <p:cNvPr id="29" name="Shape 25"/>
+          <p:cNvSpPr/>
+          <p:nvPr/>
+        </p:nvSpPr>
+        <p:spPr>
+          <a:xfrm>
+            <a:off x="6185002" y="1600200"/>
+            <a:ext cx="2609698" cy="3962095"/>
+          </a:xfrm>
+          <a:prstGeom prst="roundRect">
+            <a:avLst>
+              <a:gd name="adj" fmla="val 1962"/>
+            </a:avLst>
+          </a:prstGeom>
+          <a:solidFill>
+            <a:srgbClr val="FFFFFF"/>
+          </a:solidFill>
+          <a:ln w="12700">
+            <a:solidFill>
+              <a:srgbClr val="D9D5CB"/>
+            </a:solidFill>
+            <a:prstDash val="solid"/>
+          </a:ln>
+          <a:effectLst>
+            <a:outerShdw sx="100000" sy="100000" kx="0" ky="0" algn="bl" rotWithShape="0" blurRad="101600" dist="25400" dir="5400000">
+              <a:srgbClr val="1A2030">
+                <a:alpha val="14000"/>
+              </a:srgbClr>
+            </a:outerShdw>
+          </a:effectLst>
+        </p:spPr>
+      </p:sp>
+      <p:sp>
+        <p:nvSpPr>
+          <p:cNvPr id="30" name="Shape 26"/>
+          <p:cNvSpPr/>
+          <p:nvPr/>
+        </p:nvSpPr>
+        <p:spPr>
+          <a:xfrm>
+            <a:off x="6185002" y="1600200"/>
+            <a:ext cx="2609698" cy="38405"/>
+          </a:xfrm>
+          <a:prstGeom prst="rect">
+            <a:avLst/>
+          </a:prstGeom>
+          <a:solidFill>
+            <a:srgbClr val="07195A"/>
+          </a:solidFill>
+          <a:ln/>
+        </p:spPr>
+      </p:sp>
+      <p:sp>
+        <p:nvSpPr>
+          <p:cNvPr id="31" name="Text 27"/>
+          <p:cNvSpPr/>
+          <p:nvPr/>
+        </p:nvSpPr>
+        <p:spPr>
+          <a:xfrm>
+            <a:off x="6362395" y="1815998"/>
+            <a:ext cx="2253996" cy="139903"/>
+          </a:xfrm>
+          <a:prstGeom prst="rect">
+            <a:avLst/>
+          </a:prstGeom>
+          <a:noFill/>
+          <a:ln/>
+        </p:spPr>
+        <p:txBody>
+          <a:bodyPr wrap="square" lIns="0" tIns="0" rIns="0" bIns="0" rtlCol="0" anchor="t">
+            <a:normAutofit/>
+          </a:bodyPr>
+          <a:lstStyle/>
+          <a:p>
+            <a:pPr algn="l" indent="0" marL="0">
+              <a:lnSpc>
+                <a:spcPct val="100000"/>
+              </a:lnSpc>
+              <a:buNone/>
+            </a:pPr>
+            <a:r>
+              <a:rPr lang="en-US" sz="800" b="1" dirty="0">
+                <a:solidFill>
+                  <a:srgbClr val="A8A39A"/>
+                </a:solidFill>
+                <a:latin typeface="Century Gothic" pitchFamily="34" charset="0"/>
+                <a:ea typeface="Century Gothic" pitchFamily="34" charset="-122"/>
+                <a:cs typeface="Century Gothic" pitchFamily="34" charset="-120"/>
+              </a:rPr>
+              <a:t>03</a:t>
+            </a:r>
+            <a:endParaRPr lang="en-US" sz="800" dirty="0"/>
+          </a:p>
+        </p:txBody>
+      </p:sp>
+      <p:sp>
+        <p:nvSpPr>
+          <p:cNvPr id="32" name="Text 28"/>
+          <p:cNvSpPr/>
+          <p:nvPr/>
+        </p:nvSpPr>
+        <p:spPr>
+          <a:xfrm>
+            <a:off x="6362395" y="2006194"/>
+            <a:ext cx="2253996" cy="215798"/>
+          </a:xfrm>
+          <a:prstGeom prst="rect">
+            <a:avLst/>
+          </a:prstGeom>
+          <a:noFill/>
+          <a:ln/>
+        </p:spPr>
+        <p:txBody>
+          <a:bodyPr wrap="square" lIns="0" tIns="0" rIns="0" bIns="0" rtlCol="0" anchor="t">
+            <a:normAutofit/>
+          </a:bodyPr>
+          <a:lstStyle/>
+          <a:p>
+            <a:pPr algn="l" indent="0" marL="0">
+              <a:lnSpc>
+                <a:spcPct val="100000"/>
+              </a:lnSpc>
+              <a:buNone/>
+            </a:pPr>
+            <a:r>
+              <a:rPr lang="en-US" sz="1200" b="1" dirty="0">
+                <a:solidFill>
+                  <a:srgbClr val="07195A"/>
+                </a:solidFill>
+                <a:latin typeface="Microsoft YaHei" pitchFamily="34" charset="0"/>
+                <a:ea typeface="Microsoft YaHei" pitchFamily="34" charset="-122"/>
+                <a:cs typeface="Microsoft YaHei" pitchFamily="34" charset="-120"/>
+              </a:rPr>
+              <a:t>Assetize</a:t>
+            </a:r>
+            <a:endParaRPr lang="en-US" sz="1200" dirty="0"/>
+          </a:p>
+        </p:txBody>
+      </p:sp>
+      <p:sp>
+        <p:nvSpPr>
+          <p:cNvPr id="33" name="Shape 29"/>
+          <p:cNvSpPr/>
+          <p:nvPr/>
+        </p:nvSpPr>
+        <p:spPr>
+          <a:xfrm>
+            <a:off x="6362395" y="2311603"/>
+            <a:ext cx="457200" cy="32004"/>
+          </a:xfrm>
+          <a:prstGeom prst="rect">
+            <a:avLst/>
+          </a:prstGeom>
+          <a:solidFill>
+            <a:srgbClr val="07195A"/>
+          </a:solidFill>
+          <a:ln/>
+        </p:spPr>
+      </p:sp>
+      <p:sp>
+        <p:nvSpPr>
+          <p:cNvPr id="34" name="Shape 30"/>
+          <p:cNvSpPr/>
+          <p:nvPr/>
+        </p:nvSpPr>
+        <p:spPr>
+          <a:xfrm>
+            <a:off x="7388352" y="3086100"/>
+            <a:ext cx="202997" cy="202997"/>
           </a:xfrm>
           <a:prstGeom prst="ellipse">
             <a:avLst/>
           </a:prstGeom>
           <a:solidFill>
-            <a:srgbClr val="F3F6FA"/>
-          </a:solidFill>
+            <a:srgbClr val="07195A"/>
+          </a:solidFill>
+          <a:ln/>
+        </p:spPr>
+      </p:sp>
+      <p:sp>
+        <p:nvSpPr>
+          <p:cNvPr id="35" name="Shape 31"/>
+          <p:cNvSpPr/>
+          <p:nvPr/>
+        </p:nvSpPr>
+        <p:spPr>
+          <a:xfrm flipH="1" flipV="1">
+            <a:off x="7222846" y="2984602"/>
+            <a:ext cx="267005" cy="202997"/>
+          </a:xfrm>
+          <a:prstGeom prst="line">
+            <a:avLst/>
+          </a:prstGeom>
+          <a:noFill/>
           <a:ln w="17780">
             <a:solidFill>
               <a:srgbClr val="07195A"/>
@@ -5037,19 +5281,21 @@
       </p:sp>
       <p:sp>
         <p:nvSpPr>
-          <p:cNvPr id="36" name="Shape 33"/>
-          <p:cNvSpPr/>
-          <p:nvPr/>
-        </p:nvSpPr>
-        <p:spPr>
-          <a:xfrm flipV="1">
-            <a:off x="7200900" y="3060497"/>
-            <a:ext cx="267005" cy="202997"/>
-          </a:xfrm>
-          <a:prstGeom prst="line">
-            <a:avLst/>
-          </a:prstGeom>
-          <a:noFill/>
+          <p:cNvPr id="36" name="Shape 32"/>
+          <p:cNvSpPr/>
+          <p:nvPr/>
+        </p:nvSpPr>
+        <p:spPr>
+          <a:xfrm>
+            <a:off x="7172554" y="2933395"/>
+            <a:ext cx="101498" cy="101498"/>
+          </a:xfrm>
+          <a:prstGeom prst="ellipse">
+            <a:avLst/>
+          </a:prstGeom>
+          <a:solidFill>
+            <a:srgbClr val="F3F6FA"/>
+          </a:solidFill>
           <a:ln w="17780">
             <a:solidFill>
               <a:srgbClr val="07195A"/>
@@ -5060,21 +5306,19 @@
       </p:sp>
       <p:sp>
         <p:nvSpPr>
-          <p:cNvPr id="37" name="Shape 34"/>
-          <p:cNvSpPr/>
-          <p:nvPr/>
-        </p:nvSpPr>
-        <p:spPr>
-          <a:xfrm>
-            <a:off x="7416698" y="3010205"/>
-            <a:ext cx="101498" cy="101498"/>
-          </a:xfrm>
-          <a:prstGeom prst="ellipse">
-            <a:avLst/>
-          </a:prstGeom>
-          <a:solidFill>
-            <a:srgbClr val="F3F6FA"/>
-          </a:solidFill>
+          <p:cNvPr id="37" name="Shape 33"/>
+          <p:cNvSpPr/>
+          <p:nvPr/>
+        </p:nvSpPr>
+        <p:spPr>
+          <a:xfrm flipV="1">
+            <a:off x="7489850" y="2984602"/>
+            <a:ext cx="267005" cy="202997"/>
+          </a:xfrm>
+          <a:prstGeom prst="line">
+            <a:avLst/>
+          </a:prstGeom>
+          <a:noFill/>
           <a:ln w="17780">
             <a:solidFill>
               <a:srgbClr val="07195A"/>
@@ -5085,19 +5329,21 @@
       </p:sp>
       <p:sp>
         <p:nvSpPr>
-          <p:cNvPr id="38" name="Shape 35"/>
-          <p:cNvSpPr/>
-          <p:nvPr/>
-        </p:nvSpPr>
-        <p:spPr>
-          <a:xfrm flipH="1">
-            <a:off x="6933895" y="3263494"/>
-            <a:ext cx="267005" cy="202997"/>
-          </a:xfrm>
-          <a:prstGeom prst="line">
-            <a:avLst/>
-          </a:prstGeom>
-          <a:noFill/>
+          <p:cNvPr id="38" name="Shape 34"/>
+          <p:cNvSpPr/>
+          <p:nvPr/>
+        </p:nvSpPr>
+        <p:spPr>
+          <a:xfrm>
+            <a:off x="7705649" y="2933395"/>
+            <a:ext cx="101498" cy="101498"/>
+          </a:xfrm>
+          <a:prstGeom prst="ellipse">
+            <a:avLst/>
+          </a:prstGeom>
+          <a:solidFill>
+            <a:srgbClr val="F3F6FA"/>
+          </a:solidFill>
           <a:ln w="17780">
             <a:solidFill>
               <a:srgbClr val="07195A"/>
@@ -5108,21 +5354,19 @@
       </p:sp>
       <p:sp>
         <p:nvSpPr>
-          <p:cNvPr id="39" name="Shape 36"/>
-          <p:cNvSpPr/>
-          <p:nvPr/>
-        </p:nvSpPr>
-        <p:spPr>
-          <a:xfrm>
-            <a:off x="6883603" y="3416198"/>
-            <a:ext cx="101498" cy="101498"/>
-          </a:xfrm>
-          <a:prstGeom prst="ellipse">
-            <a:avLst/>
-          </a:prstGeom>
-          <a:solidFill>
-            <a:srgbClr val="F3F6FA"/>
-          </a:solidFill>
+          <p:cNvPr id="39" name="Shape 35"/>
+          <p:cNvSpPr/>
+          <p:nvPr/>
+        </p:nvSpPr>
+        <p:spPr>
+          <a:xfrm flipH="1">
+            <a:off x="7222846" y="3187598"/>
+            <a:ext cx="267005" cy="202997"/>
+          </a:xfrm>
+          <a:prstGeom prst="line">
+            <a:avLst/>
+          </a:prstGeom>
+          <a:noFill/>
           <a:ln w="17780">
             <a:solidFill>
               <a:srgbClr val="07195A"/>
@@ -5133,19 +5377,21 @@
       </p:sp>
       <p:sp>
         <p:nvSpPr>
-          <p:cNvPr id="40" name="Shape 37"/>
-          <p:cNvSpPr/>
-          <p:nvPr/>
-        </p:nvSpPr>
-        <p:spPr>
-          <a:xfrm>
-            <a:off x="7200900" y="3263494"/>
-            <a:ext cx="267005" cy="202997"/>
-          </a:xfrm>
-          <a:prstGeom prst="line">
-            <a:avLst/>
-          </a:prstGeom>
-          <a:noFill/>
+          <p:cNvPr id="40" name="Shape 36"/>
+          <p:cNvSpPr/>
+          <p:nvPr/>
+        </p:nvSpPr>
+        <p:spPr>
+          <a:xfrm>
+            <a:off x="7172554" y="3340303"/>
+            <a:ext cx="101498" cy="101498"/>
+          </a:xfrm>
+          <a:prstGeom prst="ellipse">
+            <a:avLst/>
+          </a:prstGeom>
+          <a:solidFill>
+            <a:srgbClr val="F3F6FA"/>
+          </a:solidFill>
           <a:ln w="17780">
             <a:solidFill>
               <a:srgbClr val="07195A"/>
@@ -5156,21 +5402,19 @@
       </p:sp>
       <p:sp>
         <p:nvSpPr>
-          <p:cNvPr id="41" name="Shape 38"/>
-          <p:cNvSpPr/>
-          <p:nvPr/>
-        </p:nvSpPr>
-        <p:spPr>
-          <a:xfrm>
-            <a:off x="7416698" y="3416198"/>
-            <a:ext cx="101498" cy="101498"/>
-          </a:xfrm>
-          <a:prstGeom prst="ellipse">
-            <a:avLst/>
-          </a:prstGeom>
-          <a:solidFill>
-            <a:srgbClr val="F3F6FA"/>
-          </a:solidFill>
+          <p:cNvPr id="41" name="Shape 37"/>
+          <p:cNvSpPr/>
+          <p:nvPr/>
+        </p:nvSpPr>
+        <p:spPr>
+          <a:xfrm>
+            <a:off x="7489850" y="3187598"/>
+            <a:ext cx="267005" cy="202997"/>
+          </a:xfrm>
+          <a:prstGeom prst="line">
+            <a:avLst/>
+          </a:prstGeom>
+          <a:noFill/>
           <a:ln w="17780">
             <a:solidFill>
               <a:srgbClr val="07195A"/>
@@ -5181,18 +5425,87 @@
       </p:sp>
       <p:sp>
         <p:nvSpPr>
-          <p:cNvPr id="42" name="Shape 39"/>
-          <p:cNvSpPr/>
-          <p:nvPr/>
-        </p:nvSpPr>
-        <p:spPr>
-          <a:xfrm>
-            <a:off x="6400800" y="4114800"/>
-            <a:ext cx="1613002" cy="304495"/>
+          <p:cNvPr id="42" name="Shape 38"/>
+          <p:cNvSpPr/>
+          <p:nvPr/>
+        </p:nvSpPr>
+        <p:spPr>
+          <a:xfrm>
+            <a:off x="7705649" y="3340303"/>
+            <a:ext cx="101498" cy="101498"/>
+          </a:xfrm>
+          <a:prstGeom prst="ellipse">
+            <a:avLst/>
+          </a:prstGeom>
+          <a:solidFill>
+            <a:srgbClr val="F3F6FA"/>
+          </a:solidFill>
+          <a:ln w="17780">
+            <a:solidFill>
+              <a:srgbClr val="07195A"/>
+            </a:solidFill>
+            <a:prstDash val="solid"/>
+          </a:ln>
+        </p:spPr>
+      </p:sp>
+      <p:sp>
+        <p:nvSpPr>
+          <p:cNvPr id="43" name="Text 39"/>
+          <p:cNvSpPr/>
+          <p:nvPr/>
+        </p:nvSpPr>
+        <p:spPr>
+          <a:xfrm>
+            <a:off x="6362395" y="3720694"/>
+            <a:ext cx="2253996" cy="952805"/>
+          </a:xfrm>
+          <a:prstGeom prst="rect">
+            <a:avLst/>
+          </a:prstGeom>
+          <a:noFill/>
+          <a:ln/>
+        </p:spPr>
+        <p:txBody>
+          <a:bodyPr wrap="square" lIns="0" tIns="0" rIns="0" bIns="0" rtlCol="0" anchor="t">
+            <a:normAutofit/>
+          </a:bodyPr>
+          <a:lstStyle/>
+          <a:p>
+            <a:pPr algn="l" indent="0" marL="0">
+              <a:lnSpc>
+                <a:spcPct val="142000"/>
+              </a:lnSpc>
+              <a:buNone/>
+            </a:pPr>
+            <a:r>
+              <a:rPr lang="en-US" sz="850" dirty="0">
+                <a:solidFill>
+                  <a:srgbClr val="3D3A32"/>
+                </a:solidFill>
+                <a:latin typeface="Microsoft YaHei" pitchFamily="34" charset="0"/>
+                <a:ea typeface="Microsoft YaHei" pitchFamily="34" charset="-122"/>
+                <a:cs typeface="Microsoft YaHei" pitchFamily="34" charset="-120"/>
+              </a:rPr>
+              <a:t>Turn one-off experience into reusable knowledge.</a:t>
+            </a:r>
+            <a:endParaRPr lang="en-US" sz="850" dirty="0"/>
+          </a:p>
+        </p:txBody>
+      </p:sp>
+      <p:sp>
+        <p:nvSpPr>
+          <p:cNvPr id="44" name="Shape 40"/>
+          <p:cNvSpPr/>
+          <p:nvPr/>
+        </p:nvSpPr>
+        <p:spPr>
+          <a:xfrm>
+            <a:off x="6362395" y="5067605"/>
+            <a:ext cx="2253996" cy="342900"/>
           </a:xfrm>
           <a:prstGeom prst="roundRect">
             <a:avLst>
-              <a:gd name="adj" fmla="val 16817"/>
+              <a:gd name="adj" fmla="val 14933"/>
             </a:avLst>
           </a:prstGeom>
           <a:solidFill>
@@ -5208,14 +5521,14 @@
       </p:sp>
       <p:sp>
         <p:nvSpPr>
-          <p:cNvPr id="43" name="Text 40"/>
-          <p:cNvSpPr/>
-          <p:nvPr/>
-        </p:nvSpPr>
-        <p:spPr>
-          <a:xfrm>
-            <a:off x="6400800" y="4177894"/>
-            <a:ext cx="1613002" cy="165506"/>
+          <p:cNvPr id="45" name="Text 41"/>
+          <p:cNvSpPr/>
+          <p:nvPr/>
+        </p:nvSpPr>
+        <p:spPr>
+          <a:xfrm>
+            <a:off x="6362395" y="5149901"/>
+            <a:ext cx="2253996" cy="177394"/>
           </a:xfrm>
           <a:prstGeom prst="rect">
             <a:avLst/>
@@ -5252,68 +5565,82 @@
       </p:sp>
       <p:sp>
         <p:nvSpPr>
-          <p:cNvPr id="44" name="Shape 41"/>
-          <p:cNvSpPr/>
-          <p:nvPr/>
-        </p:nvSpPr>
-        <p:spPr>
-          <a:xfrm>
-            <a:off x="8661197" y="1524305"/>
-            <a:ext cx="6401" cy="3301898"/>
-          </a:xfrm>
-          <a:prstGeom prst="rect">
-            <a:avLst/>
-          </a:prstGeom>
-          <a:solidFill>
-            <a:srgbClr val="D9D5CB"/>
-          </a:solidFill>
-          <a:ln/>
-        </p:spPr>
-      </p:sp>
-      <p:sp>
-        <p:nvSpPr>
-          <p:cNvPr id="45" name="Shape 42"/>
-          <p:cNvSpPr/>
-          <p:nvPr/>
-        </p:nvSpPr>
-        <p:spPr>
-          <a:xfrm>
-            <a:off x="8839505" y="1574597"/>
-            <a:ext cx="267005" cy="267005"/>
-          </a:xfrm>
-          <a:prstGeom prst="rect">
-            <a:avLst/>
-          </a:prstGeom>
-          <a:solidFill>
-            <a:srgbClr val="C51516"/>
-          </a:solidFill>
-          <a:ln/>
-        </p:spPr>
-      </p:sp>
-      <p:sp>
-        <p:nvSpPr>
-          <p:cNvPr id="46" name="Text 43"/>
-          <p:cNvSpPr/>
-          <p:nvPr/>
-        </p:nvSpPr>
-        <p:spPr>
-          <a:xfrm>
-            <a:off x="8839505" y="1638605"/>
-            <a:ext cx="267005" cy="127102"/>
-          </a:xfrm>
-          <a:prstGeom prst="rect">
-            <a:avLst/>
-          </a:prstGeom>
-          <a:noFill/>
-          <a:ln/>
-        </p:spPr>
-        <p:txBody>
-          <a:bodyPr wrap="square" lIns="0" tIns="0" rIns="0" bIns="0" rtlCol="0" anchor="t">
-            <a:normAutofit/>
-          </a:bodyPr>
-          <a:lstStyle/>
-          <a:p>
-            <a:pPr algn="ctr" indent="0" marL="0">
+          <p:cNvPr id="46" name="Shape 42"/>
+          <p:cNvSpPr/>
+          <p:nvPr/>
+        </p:nvSpPr>
+        <p:spPr>
+          <a:xfrm>
+            <a:off x="8973007" y="1600200"/>
+            <a:ext cx="2609698" cy="3962095"/>
+          </a:xfrm>
+          <a:prstGeom prst="roundRect">
+            <a:avLst>
+              <a:gd name="adj" fmla="val 1962"/>
+            </a:avLst>
+          </a:prstGeom>
+          <a:solidFill>
+            <a:srgbClr val="FFFFFF"/>
+          </a:solidFill>
+          <a:ln w="12700">
+            <a:solidFill>
+              <a:srgbClr val="D9D5CB"/>
+            </a:solidFill>
+            <a:prstDash val="solid"/>
+          </a:ln>
+          <a:effectLst>
+            <a:outerShdw sx="100000" sy="100000" kx="0" ky="0" algn="bl" rotWithShape="0" blurRad="101600" dist="25400" dir="5400000">
+              <a:srgbClr val="1A2030">
+                <a:alpha val="14000"/>
+              </a:srgbClr>
+            </a:outerShdw>
+          </a:effectLst>
+        </p:spPr>
+      </p:sp>
+      <p:sp>
+        <p:nvSpPr>
+          <p:cNvPr id="47" name="Shape 43"/>
+          <p:cNvSpPr/>
+          <p:nvPr/>
+        </p:nvSpPr>
+        <p:spPr>
+          <a:xfrm>
+            <a:off x="8973007" y="1600200"/>
+            <a:ext cx="2609698" cy="38405"/>
+          </a:xfrm>
+          <a:prstGeom prst="rect">
+            <a:avLst/>
+          </a:prstGeom>
+          <a:solidFill>
+            <a:srgbClr val="07195A"/>
+          </a:solidFill>
+          <a:ln/>
+        </p:spPr>
+      </p:sp>
+      <p:sp>
+        <p:nvSpPr>
+          <p:cNvPr id="48" name="Text 44"/>
+          <p:cNvSpPr/>
+          <p:nvPr/>
+        </p:nvSpPr>
+        <p:spPr>
+          <a:xfrm>
+            <a:off x="9150401" y="1815998"/>
+            <a:ext cx="2253996" cy="139903"/>
+          </a:xfrm>
+          <a:prstGeom prst="rect">
+            <a:avLst/>
+          </a:prstGeom>
+          <a:noFill/>
+          <a:ln/>
+        </p:spPr>
+        <p:txBody>
+          <a:bodyPr wrap="square" lIns="0" tIns="0" rIns="0" bIns="0" rtlCol="0" anchor="t">
+            <a:normAutofit/>
+          </a:bodyPr>
+          <a:lstStyle/>
+          <a:p>
+            <a:pPr algn="l" indent="0" marL="0">
               <a:lnSpc>
                 <a:spcPct val="100000"/>
               </a:lnSpc>
@@ -5322,7 +5649,7 @@
             <a:r>
               <a:rPr lang="en-US" sz="800" b="1" dirty="0">
                 <a:solidFill>
-                  <a:srgbClr val="FFFFFF"/>
+                  <a:srgbClr val="A8A39A"/>
                 </a:solidFill>
                 <a:latin typeface="Century Gothic" pitchFamily="34" charset="0"/>
                 <a:ea typeface="Century Gothic" pitchFamily="34" charset="-122"/>
@@ -5336,14 +5663,14 @@
       </p:sp>
       <p:sp>
         <p:nvSpPr>
-          <p:cNvPr id="47" name="Text 44"/>
-          <p:cNvSpPr/>
-          <p:nvPr/>
-        </p:nvSpPr>
-        <p:spPr>
-          <a:xfrm>
-            <a:off x="9195206" y="1561795"/>
-            <a:ext cx="1904695" cy="190195"/>
+          <p:cNvPr id="49" name="Text 45"/>
+          <p:cNvSpPr/>
+          <p:nvPr/>
+        </p:nvSpPr>
+        <p:spPr>
+          <a:xfrm>
+            <a:off x="9150401" y="2006194"/>
+            <a:ext cx="2253996" cy="215798"/>
           </a:xfrm>
           <a:prstGeom prst="rect">
             <a:avLst/>
@@ -5364,9 +5691,9 @@
               <a:buNone/>
             </a:pPr>
             <a:r>
-              <a:rPr lang="en-US" sz="1100" b="1" dirty="0">
-                <a:solidFill>
-                  <a:srgbClr val="C51516"/>
+              <a:rPr lang="en-US" sz="1200" b="1" dirty="0">
+                <a:solidFill>
+                  <a:srgbClr val="07195A"/>
                 </a:solidFill>
                 <a:latin typeface="Microsoft YaHei" pitchFamily="34" charset="0"/>
                 <a:ea typeface="Microsoft YaHei" pitchFamily="34" charset="-122"/>
@@ -5374,83 +5701,39 @@
               </a:rPr>
               <a:t>Decide</a:t>
             </a:r>
-            <a:endParaRPr lang="en-US" sz="1100" dirty="0"/>
-          </a:p>
-        </p:txBody>
-      </p:sp>
-      <p:sp>
-        <p:nvSpPr>
-          <p:cNvPr id="48" name="Shape 45"/>
-          <p:cNvSpPr/>
-          <p:nvPr/>
-        </p:nvSpPr>
-        <p:spPr>
-          <a:xfrm>
-            <a:off x="9195206" y="1828800"/>
-            <a:ext cx="609905" cy="32004"/>
-          </a:xfrm>
-          <a:prstGeom prst="rect">
-            <a:avLst/>
-          </a:prstGeom>
-          <a:solidFill>
-            <a:srgbClr val="C51516"/>
-          </a:solidFill>
-          <a:ln/>
-        </p:spPr>
-      </p:sp>
-      <p:sp>
-        <p:nvSpPr>
-          <p:cNvPr id="49" name="Text 46"/>
-          <p:cNvSpPr/>
-          <p:nvPr/>
-        </p:nvSpPr>
-        <p:spPr>
-          <a:xfrm>
-            <a:off x="8839505" y="2108606"/>
-            <a:ext cx="2222906" cy="470002"/>
-          </a:xfrm>
-          <a:prstGeom prst="rect">
-            <a:avLst/>
-          </a:prstGeom>
-          <a:noFill/>
-          <a:ln/>
-        </p:spPr>
-        <p:txBody>
-          <a:bodyPr wrap="square" lIns="0" tIns="0" rIns="0" bIns="0" rtlCol="0" anchor="t">
-            <a:normAutofit/>
-          </a:bodyPr>
-          <a:lstStyle/>
-          <a:p>
-            <a:pPr algn="l" indent="0" marL="0">
-              <a:lnSpc>
-                <a:spcPct val="125000"/>
-              </a:lnSpc>
-              <a:buNone/>
-            </a:pPr>
-            <a:r>
-              <a:rPr lang="en-US" sz="850" dirty="0">
-                <a:solidFill>
-                  <a:srgbClr val="3D3A32"/>
-                </a:solidFill>
-                <a:latin typeface="Microsoft YaHei" pitchFamily="34" charset="0"/>
-                <a:ea typeface="Microsoft YaHei" pitchFamily="34" charset="-122"/>
-                <a:cs typeface="Microsoft YaHei" pitchFamily="34" charset="-120"/>
-              </a:rPr>
-              <a:t>Unify language across teams.</a:t>
-            </a:r>
-            <a:endParaRPr lang="en-US" sz="850" dirty="0"/>
-          </a:p>
-        </p:txBody>
-      </p:sp>
-      <p:sp>
-        <p:nvSpPr>
-          <p:cNvPr id="50" name="Shape 47"/>
-          <p:cNvSpPr/>
-          <p:nvPr/>
-        </p:nvSpPr>
-        <p:spPr>
-          <a:xfrm>
-            <a:off x="9804197" y="3098902"/>
+            <a:endParaRPr lang="en-US" sz="1200" dirty="0"/>
+          </a:p>
+        </p:txBody>
+      </p:sp>
+      <p:sp>
+        <p:nvSpPr>
+          <p:cNvPr id="50" name="Shape 46"/>
+          <p:cNvSpPr/>
+          <p:nvPr/>
+        </p:nvSpPr>
+        <p:spPr>
+          <a:xfrm>
+            <a:off x="9150401" y="2311603"/>
+            <a:ext cx="457200" cy="32004"/>
+          </a:xfrm>
+          <a:prstGeom prst="rect">
+            <a:avLst/>
+          </a:prstGeom>
+          <a:solidFill>
+            <a:srgbClr val="07195A"/>
+          </a:solidFill>
+          <a:ln/>
+        </p:spPr>
+      </p:sp>
+      <p:sp>
+        <p:nvSpPr>
+          <p:cNvPr id="51" name="Shape 47"/>
+          <p:cNvSpPr/>
+          <p:nvPr/>
+        </p:nvSpPr>
+        <p:spPr>
+          <a:xfrm>
+            <a:off x="10137953" y="3023006"/>
             <a:ext cx="279806" cy="330098"/>
           </a:xfrm>
           <a:prstGeom prst="roundRect">
@@ -5459,11 +5742,11 @@
             </a:avLst>
           </a:prstGeom>
           <a:solidFill>
-            <a:srgbClr val="FBECEB"/>
+            <a:srgbClr val="F3F6FA"/>
           </a:solidFill>
           <a:ln w="17780">
             <a:solidFill>
-              <a:srgbClr val="C51516"/>
+              <a:srgbClr val="07195A"/>
             </a:solidFill>
             <a:prstDash val="solid"/>
           </a:ln>
@@ -5471,13 +5754,13 @@
       </p:sp>
       <p:sp>
         <p:nvSpPr>
-          <p:cNvPr id="51" name="Shape 48"/>
-          <p:cNvSpPr/>
-          <p:nvPr/>
-        </p:nvSpPr>
-        <p:spPr>
-          <a:xfrm>
-            <a:off x="9868205" y="3219602"/>
+          <p:cNvPr id="52" name="Shape 48"/>
+          <p:cNvSpPr/>
+          <p:nvPr/>
+        </p:nvSpPr>
+        <p:spPr>
+          <a:xfrm>
+            <a:off x="10201046" y="3143707"/>
             <a:ext cx="152705" cy="0"/>
           </a:xfrm>
           <a:prstGeom prst="line">
@@ -5486,7 +5769,7 @@
           <a:noFill/>
           <a:ln w="17780">
             <a:solidFill>
-              <a:srgbClr val="C51516"/>
+              <a:srgbClr val="07195A"/>
             </a:solidFill>
             <a:prstDash val="solid"/>
           </a:ln>
@@ -5494,13 +5777,13 @@
       </p:sp>
       <p:sp>
         <p:nvSpPr>
-          <p:cNvPr id="52" name="Shape 49"/>
-          <p:cNvSpPr/>
-          <p:nvPr/>
-        </p:nvSpPr>
-        <p:spPr>
-          <a:xfrm>
-            <a:off x="9868205" y="3301898"/>
+          <p:cNvPr id="53" name="Shape 49"/>
+          <p:cNvSpPr/>
+          <p:nvPr/>
+        </p:nvSpPr>
+        <p:spPr>
+          <a:xfrm>
+            <a:off x="10201046" y="3226003"/>
             <a:ext cx="152705" cy="0"/>
           </a:xfrm>
           <a:prstGeom prst="line">
@@ -5509,7 +5792,7 @@
           <a:noFill/>
           <a:ln w="17780">
             <a:solidFill>
-              <a:srgbClr val="C51516"/>
+              <a:srgbClr val="07195A"/>
             </a:solidFill>
             <a:prstDash val="solid"/>
           </a:ln>
@@ -5517,26 +5800,70 @@
       </p:sp>
       <p:sp>
         <p:nvSpPr>
-          <p:cNvPr id="53" name="Shape 50"/>
-          <p:cNvSpPr/>
-          <p:nvPr/>
-        </p:nvSpPr>
-        <p:spPr>
-          <a:xfrm>
-            <a:off x="9144000" y="4114800"/>
-            <a:ext cx="1613002" cy="304495"/>
+          <p:cNvPr id="54" name="Text 50"/>
+          <p:cNvSpPr/>
+          <p:nvPr/>
+        </p:nvSpPr>
+        <p:spPr>
+          <a:xfrm>
+            <a:off x="9150401" y="3720694"/>
+            <a:ext cx="2253996" cy="952805"/>
+          </a:xfrm>
+          <a:prstGeom prst="rect">
+            <a:avLst/>
+          </a:prstGeom>
+          <a:noFill/>
+          <a:ln/>
+        </p:spPr>
+        <p:txBody>
+          <a:bodyPr wrap="square" lIns="0" tIns="0" rIns="0" bIns="0" rtlCol="0" anchor="t">
+            <a:normAutofit/>
+          </a:bodyPr>
+          <a:lstStyle/>
+          <a:p>
+            <a:pPr algn="l" indent="0" marL="0">
+              <a:lnSpc>
+                <a:spcPct val="142000"/>
+              </a:lnSpc>
+              <a:buNone/>
+            </a:pPr>
+            <a:r>
+              <a:rPr lang="en-US" sz="850" dirty="0">
+                <a:solidFill>
+                  <a:srgbClr val="3D3A32"/>
+                </a:solidFill>
+                <a:latin typeface="Microsoft YaHei" pitchFamily="34" charset="0"/>
+                <a:ea typeface="Microsoft YaHei" pitchFamily="34" charset="-122"/>
+                <a:cs typeface="Microsoft YaHei" pitchFamily="34" charset="-120"/>
+              </a:rPr>
+              <a:t>Unify language across teams.</a:t>
+            </a:r>
+            <a:endParaRPr lang="en-US" sz="850" dirty="0"/>
+          </a:p>
+        </p:txBody>
+      </p:sp>
+      <p:sp>
+        <p:nvSpPr>
+          <p:cNvPr id="55" name="Shape 51"/>
+          <p:cNvSpPr/>
+          <p:nvPr/>
+        </p:nvSpPr>
+        <p:spPr>
+          <a:xfrm>
+            <a:off x="9150401" y="5067605"/>
+            <a:ext cx="2253996" cy="342900"/>
           </a:xfrm>
           <a:prstGeom prst="roundRect">
             <a:avLst>
-              <a:gd name="adj" fmla="val 16817"/>
+              <a:gd name="adj" fmla="val 14933"/>
             </a:avLst>
           </a:prstGeom>
           <a:solidFill>
-            <a:srgbClr val="FBECEB"/>
+            <a:srgbClr val="F3F6FA"/>
           </a:solidFill>
           <a:ln w="12700">
             <a:solidFill>
-              <a:srgbClr val="C51516"/>
+              <a:srgbClr val="D9D5CB"/>
             </a:solidFill>
             <a:prstDash val="solid"/>
           </a:ln>
@@ -5544,14 +5871,14 @@
       </p:sp>
       <p:sp>
         <p:nvSpPr>
-          <p:cNvPr id="54" name="Text 51"/>
-          <p:cNvSpPr/>
-          <p:nvPr/>
-        </p:nvSpPr>
-        <p:spPr>
-          <a:xfrm>
-            <a:off x="9144000" y="4177894"/>
-            <a:ext cx="1613002" cy="165506"/>
+          <p:cNvPr id="56" name="Text 52"/>
+          <p:cNvSpPr/>
+          <p:nvPr/>
+        </p:nvSpPr>
+        <p:spPr>
+          <a:xfrm>
+            <a:off x="9150401" y="5149901"/>
+            <a:ext cx="2253996" cy="177394"/>
           </a:xfrm>
           <a:prstGeom prst="rect">
             <a:avLst/>
@@ -5574,7 +5901,7 @@
             <a:r>
               <a:rPr lang="en-US" sz="850" b="1" dirty="0">
                 <a:solidFill>
-                  <a:srgbClr val="C51516"/>
+                  <a:srgbClr val="07195A"/>
                 </a:solidFill>
                 <a:latin typeface="Microsoft YaHei" pitchFamily="34" charset="0"/>
                 <a:ea typeface="Microsoft YaHei" pitchFamily="34" charset="-122"/>
@@ -5588,7 +5915,7 @@
       </p:sp>
       <p:sp>
         <p:nvSpPr>
-          <p:cNvPr id="55" name="Shape 52"/>
+          <p:cNvPr id="57" name="Shape 53"/>
           <p:cNvSpPr/>
           <p:nvPr/>
         </p:nvSpPr>
@@ -5647,7 +5974,7 @@
         <p:spPr>
           <a:xfrm>
             <a:off x="609905" y="457200"/>
-            <a:ext cx="9525305" cy="368503"/>
+            <a:ext cx="9905695" cy="368503"/>
           </a:xfrm>
           <a:prstGeom prst="rect">
             <a:avLst/>
@@ -5671,47 +5998,159 @@
               <a:rPr lang="en-US" sz="2000" b="1" dirty="0">
                 <a:solidFill>
                   <a:srgbClr val="C51516"/>
+                </a:solidFill>
+                <a:latin typeface="Century Gothic" pitchFamily="34" charset="0"/>
+                <a:ea typeface="Century Gothic" pitchFamily="34" charset="-122"/>
+                <a:cs typeface="Century Gothic" pitchFamily="34" charset="-120"/>
+              </a:rPr>
+              <a:t>System Architecture Center</a:t>
+            </a:r>
+            <a:endParaRPr lang="en-US" sz="2000" dirty="0"/>
+          </a:p>
+        </p:txBody>
+      </p:sp>
+      <p:sp>
+        <p:nvSpPr>
+          <p:cNvPr id="4" name="Shape 1"/>
+          <p:cNvSpPr/>
+          <p:nvPr/>
+        </p:nvSpPr>
+        <p:spPr>
+          <a:xfrm>
+            <a:off x="609905" y="914400"/>
+            <a:ext cx="4826203" cy="19202"/>
+          </a:xfrm>
+          <a:prstGeom prst="rect">
+            <a:avLst/>
+          </a:prstGeom>
+          <a:solidFill>
+            <a:srgbClr val="C51516"/>
+          </a:solidFill>
+          <a:ln/>
+        </p:spPr>
+      </p:sp>
+      <p:sp>
+        <p:nvSpPr>
+          <p:cNvPr id="5" name="Text 2"/>
+          <p:cNvSpPr/>
+          <p:nvPr/>
+        </p:nvSpPr>
+        <p:spPr>
+          <a:xfrm>
+            <a:off x="609905" y="1041502"/>
+            <a:ext cx="9525305" cy="215798"/>
+          </a:xfrm>
+          <a:prstGeom prst="rect">
+            <a:avLst/>
+          </a:prstGeom>
+          <a:noFill/>
+          <a:ln/>
+        </p:spPr>
+        <p:txBody>
+          <a:bodyPr wrap="square" lIns="0" tIns="0" rIns="0" bIns="0" rtlCol="0" anchor="t">
+            <a:normAutofit/>
+          </a:bodyPr>
+          <a:lstStyle/>
+          <a:p>
+            <a:pPr algn="l" indent="0" marL="0">
+              <a:lnSpc>
+                <a:spcPct val="100000"/>
+              </a:lnSpc>
+              <a:buNone/>
+            </a:pPr>
+            <a:r>
+              <a:rPr lang="en-US" sz="900" dirty="0">
+                <a:solidFill>
+                  <a:srgbClr val="666666"/>
+                </a:solidFill>
+                <a:latin typeface="Century Gothic" pitchFamily="34" charset="0"/>
+                <a:ea typeface="Century Gothic" pitchFamily="34" charset="-122"/>
+                <a:cs typeface="Century Gothic" pitchFamily="34" charset="-120"/>
+              </a:rPr>
+              <a:t>For platform, product architecture, data flow, and control flow.</a:t>
+            </a:r>
+            <a:endParaRPr lang="en-US" sz="900" dirty="0"/>
+          </a:p>
+        </p:txBody>
+      </p:sp>
+      <p:pic>
+        <p:nvPicPr>
+          <p:cNvPr id="6" name="Image 0" descr="theme/assets/logo-westwell.png">    </p:cNvPr>
+          <p:cNvPicPr>
+            <a:picLocks noChangeAspect="1"/>
+          </p:cNvPicPr>
+          <p:nvPr/>
+        </p:nvPicPr>
+        <p:blipFill>
+          <a:blip r:embed="rId1"/>
+          <a:stretch>
+            <a:fillRect/>
+          </a:stretch>
+        </p:blipFill>
+        <p:spPr>
+          <a:xfrm>
+            <a:off x="11162995" y="520294"/>
+            <a:ext cx="571500" cy="462686"/>
+          </a:xfrm>
+          <a:prstGeom prst="rect">
+            <a:avLst/>
+          </a:prstGeom>
+        </p:spPr>
+      </p:pic>
+      <p:sp>
+        <p:nvSpPr>
+          <p:cNvPr id="7" name="Text 3"/>
+          <p:cNvSpPr/>
+          <p:nvPr/>
+        </p:nvSpPr>
+        <p:spPr>
+          <a:xfrm>
+            <a:off x="698602" y="1410005"/>
+            <a:ext cx="2095805" cy="177394"/>
+          </a:xfrm>
+          <a:prstGeom prst="rect">
+            <a:avLst/>
+          </a:prstGeom>
+          <a:noFill/>
+          <a:ln/>
+        </p:spPr>
+        <p:txBody>
+          <a:bodyPr wrap="square" lIns="0" tIns="0" rIns="0" bIns="0" rtlCol="0" anchor="t">
+            <a:normAutofit/>
+          </a:bodyPr>
+          <a:lstStyle/>
+          <a:p>
+            <a:pPr algn="l" indent="0" marL="0">
+              <a:lnSpc>
+                <a:spcPct val="100000"/>
+              </a:lnSpc>
+              <a:buNone/>
+            </a:pPr>
+            <a:r>
+              <a:rPr lang="en-US" sz="900" b="1" dirty="0">
+                <a:solidFill>
+                  <a:srgbClr val="07195A"/>
                 </a:solidFill>
                 <a:latin typeface="Microsoft YaHei" pitchFamily="34" charset="0"/>
                 <a:ea typeface="Microsoft YaHei" pitchFamily="34" charset="-122"/>
                 <a:cs typeface="Microsoft YaHei" pitchFamily="34" charset="-120"/>
               </a:rPr>
-              <a:t>System Architecture Center</a:t>
-            </a:r>
-            <a:endParaRPr lang="en-US" sz="2000" dirty="0"/>
-          </a:p>
-        </p:txBody>
-      </p:sp>
-      <p:sp>
-        <p:nvSpPr>
-          <p:cNvPr id="4" name="Shape 1"/>
-          <p:cNvSpPr/>
-          <p:nvPr/>
-        </p:nvSpPr>
-        <p:spPr>
-          <a:xfrm>
-            <a:off x="609905" y="914400"/>
-            <a:ext cx="4826203" cy="19202"/>
-          </a:xfrm>
-          <a:prstGeom prst="rect">
-            <a:avLst/>
-          </a:prstGeom>
-          <a:solidFill>
-            <a:srgbClr val="C51516"/>
-          </a:solidFill>
-          <a:ln/>
-        </p:spPr>
-      </p:sp>
-      <p:sp>
-        <p:nvSpPr>
-          <p:cNvPr id="5" name="Text 2"/>
-          <p:cNvSpPr/>
-          <p:nvPr/>
-        </p:nvSpPr>
-        <p:spPr>
-          <a:xfrm>
-            <a:off x="609905" y="1041502"/>
-            <a:ext cx="9778594" cy="215798"/>
+              <a:t>Inputs</a:t>
+            </a:r>
+            <a:endParaRPr lang="en-US" sz="900" dirty="0"/>
+          </a:p>
+        </p:txBody>
+      </p:sp>
+      <p:sp>
+        <p:nvSpPr>
+          <p:cNvPr id="8" name="Text 4"/>
+          <p:cNvSpPr/>
+          <p:nvPr/>
+        </p:nvSpPr>
+        <p:spPr>
+          <a:xfrm>
+            <a:off x="8413394" y="1410005"/>
+            <a:ext cx="2095805" cy="177394"/>
           </a:xfrm>
           <a:prstGeom prst="rect">
             <a:avLst/>
@@ -5732,15 +6171,15 @@
               <a:buNone/>
             </a:pPr>
             <a:r>
-              <a:rPr lang="en-US" sz="900" dirty="0">
-                <a:solidFill>
-                  <a:srgbClr val="666666"/>
+              <a:rPr lang="en-US" sz="900" b="1" dirty="0">
+                <a:solidFill>
+                  <a:srgbClr val="07195A"/>
                 </a:solidFill>
                 <a:latin typeface="Microsoft YaHei" pitchFamily="34" charset="0"/>
                 <a:ea typeface="Microsoft YaHei" pitchFamily="34" charset="-122"/>
                 <a:cs typeface="Microsoft YaHei" pitchFamily="34" charset="-120"/>
               </a:rPr>
-              <a:t>For platform, product architecture, data flow, and control flow.</a:t>
+              <a:t>Outputs</a:t>
             </a:r>
             <a:endParaRPr lang="en-US" sz="900" dirty="0"/>
           </a:p>
@@ -5748,95 +6187,7 @@
       </p:sp>
       <p:sp>
         <p:nvSpPr>
-          <p:cNvPr id="6" name="Text 3"/>
-          <p:cNvSpPr/>
-          <p:nvPr/>
-        </p:nvSpPr>
-        <p:spPr>
-          <a:xfrm>
-            <a:off x="698602" y="1410005"/>
-            <a:ext cx="2095805" cy="177394"/>
-          </a:xfrm>
-          <a:prstGeom prst="rect">
-            <a:avLst/>
-          </a:prstGeom>
-          <a:noFill/>
-          <a:ln/>
-        </p:spPr>
-        <p:txBody>
-          <a:bodyPr wrap="square" lIns="0" tIns="0" rIns="0" bIns="0" rtlCol="0" anchor="t">
-            <a:normAutofit/>
-          </a:bodyPr>
-          <a:lstStyle/>
-          <a:p>
-            <a:pPr algn="l" indent="0" marL="0">
-              <a:lnSpc>
-                <a:spcPct val="100000"/>
-              </a:lnSpc>
-              <a:buNone/>
-            </a:pPr>
-            <a:r>
-              <a:rPr lang="en-US" sz="900" b="1" dirty="0">
-                <a:solidFill>
-                  <a:srgbClr val="07195A"/>
-                </a:solidFill>
-                <a:latin typeface="Microsoft YaHei" pitchFamily="34" charset="0"/>
-                <a:ea typeface="Microsoft YaHei" pitchFamily="34" charset="-122"/>
-                <a:cs typeface="Microsoft YaHei" pitchFamily="34" charset="-120"/>
-              </a:rPr>
-              <a:t>Inputs</a:t>
-            </a:r>
-            <a:endParaRPr lang="en-US" sz="900" dirty="0"/>
-          </a:p>
-        </p:txBody>
-      </p:sp>
-      <p:sp>
-        <p:nvSpPr>
-          <p:cNvPr id="7" name="Text 4"/>
-          <p:cNvSpPr/>
-          <p:nvPr/>
-        </p:nvSpPr>
-        <p:spPr>
-          <a:xfrm>
-            <a:off x="8413394" y="1410005"/>
-            <a:ext cx="2095805" cy="177394"/>
-          </a:xfrm>
-          <a:prstGeom prst="rect">
-            <a:avLst/>
-          </a:prstGeom>
-          <a:noFill/>
-          <a:ln/>
-        </p:spPr>
-        <p:txBody>
-          <a:bodyPr wrap="square" lIns="0" tIns="0" rIns="0" bIns="0" rtlCol="0" anchor="t">
-            <a:normAutofit/>
-          </a:bodyPr>
-          <a:lstStyle/>
-          <a:p>
-            <a:pPr algn="l" indent="0" marL="0">
-              <a:lnSpc>
-                <a:spcPct val="100000"/>
-              </a:lnSpc>
-              <a:buNone/>
-            </a:pPr>
-            <a:r>
-              <a:rPr lang="en-US" sz="900" b="1" dirty="0">
-                <a:solidFill>
-                  <a:srgbClr val="07195A"/>
-                </a:solidFill>
-                <a:latin typeface="Microsoft YaHei" pitchFamily="34" charset="0"/>
-                <a:ea typeface="Microsoft YaHei" pitchFamily="34" charset="-122"/>
-                <a:cs typeface="Microsoft YaHei" pitchFamily="34" charset="-120"/>
-              </a:rPr>
-              <a:t>Outputs</a:t>
-            </a:r>
-            <a:endParaRPr lang="en-US" sz="900" dirty="0"/>
-          </a:p>
-        </p:txBody>
-      </p:sp>
-      <p:sp>
-        <p:nvSpPr>
-          <p:cNvPr id="8" name="Shape 5"/>
+          <p:cNvPr id="9" name="Shape 5"/>
           <p:cNvSpPr/>
           <p:nvPr/>
         </p:nvSpPr>
@@ -5863,7 +6214,7 @@
       </p:sp>
       <p:sp>
         <p:nvSpPr>
-          <p:cNvPr id="9" name="Text 6"/>
+          <p:cNvPr id="10" name="Text 6"/>
           <p:cNvSpPr/>
           <p:nvPr/>
         </p:nvSpPr>
@@ -5907,7 +6258,7 @@
       </p:sp>
       <p:sp>
         <p:nvSpPr>
-          <p:cNvPr id="10" name="Shape 7"/>
+          <p:cNvPr id="11" name="Shape 7"/>
           <p:cNvSpPr/>
           <p:nvPr/>
         </p:nvSpPr>
@@ -5931,7 +6282,7 @@
       </p:sp>
       <p:sp>
         <p:nvSpPr>
-          <p:cNvPr id="11" name="Shape 8"/>
+          <p:cNvPr id="12" name="Shape 8"/>
           <p:cNvSpPr/>
           <p:nvPr/>
         </p:nvSpPr>
@@ -5958,7 +6309,7 @@
       </p:sp>
       <p:sp>
         <p:nvSpPr>
-          <p:cNvPr id="12" name="Text 9"/>
+          <p:cNvPr id="13" name="Text 9"/>
           <p:cNvSpPr/>
           <p:nvPr/>
         </p:nvSpPr>
@@ -6002,7 +6353,7 @@
       </p:sp>
       <p:sp>
         <p:nvSpPr>
-          <p:cNvPr id="13" name="Shape 10"/>
+          <p:cNvPr id="14" name="Shape 10"/>
           <p:cNvSpPr/>
           <p:nvPr/>
         </p:nvSpPr>
@@ -6026,7 +6377,7 @@
       </p:sp>
       <p:sp>
         <p:nvSpPr>
-          <p:cNvPr id="14" name="Shape 11"/>
+          <p:cNvPr id="15" name="Shape 11"/>
           <p:cNvSpPr/>
           <p:nvPr/>
         </p:nvSpPr>
@@ -6053,7 +6404,7 @@
       </p:sp>
       <p:sp>
         <p:nvSpPr>
-          <p:cNvPr id="15" name="Text 12"/>
+          <p:cNvPr id="16" name="Text 12"/>
           <p:cNvSpPr/>
           <p:nvPr/>
         </p:nvSpPr>
@@ -6097,7 +6448,7 @@
       </p:sp>
       <p:sp>
         <p:nvSpPr>
-          <p:cNvPr id="16" name="Shape 13"/>
+          <p:cNvPr id="17" name="Shape 13"/>
           <p:cNvSpPr/>
           <p:nvPr/>
         </p:nvSpPr>
@@ -6121,7 +6472,7 @@
       </p:sp>
       <p:sp>
         <p:nvSpPr>
-          <p:cNvPr id="17" name="Shape 14"/>
+          <p:cNvPr id="18" name="Shape 14"/>
           <p:cNvSpPr/>
           <p:nvPr/>
         </p:nvSpPr>
@@ -6148,7 +6499,7 @@
       </p:sp>
       <p:sp>
         <p:nvSpPr>
-          <p:cNvPr id="18" name="Text 15"/>
+          <p:cNvPr id="19" name="Text 15"/>
           <p:cNvSpPr/>
           <p:nvPr/>
         </p:nvSpPr>
@@ -6192,7 +6543,7 @@
       </p:sp>
       <p:sp>
         <p:nvSpPr>
-          <p:cNvPr id="19" name="Shape 16"/>
+          <p:cNvPr id="20" name="Shape 16"/>
           <p:cNvSpPr/>
           <p:nvPr/>
         </p:nvSpPr>
@@ -6216,7 +6567,7 @@
       </p:sp>
       <p:sp>
         <p:nvSpPr>
-          <p:cNvPr id="20" name="Shape 17"/>
+          <p:cNvPr id="21" name="Shape 17"/>
           <p:cNvSpPr/>
           <p:nvPr/>
         </p:nvSpPr>
@@ -6243,7 +6594,7 @@
       </p:sp>
       <p:sp>
         <p:nvSpPr>
-          <p:cNvPr id="21" name="Text 18"/>
+          <p:cNvPr id="22" name="Text 18"/>
           <p:cNvSpPr/>
           <p:nvPr/>
         </p:nvSpPr>
@@ -6287,7 +6638,7 @@
       </p:sp>
       <p:sp>
         <p:nvSpPr>
-          <p:cNvPr id="22" name="Shape 19"/>
+          <p:cNvPr id="23" name="Shape 19"/>
           <p:cNvSpPr/>
           <p:nvPr/>
         </p:nvSpPr>
@@ -6311,7 +6662,7 @@
       </p:sp>
       <p:sp>
         <p:nvSpPr>
-          <p:cNvPr id="23" name="Shape 20"/>
+          <p:cNvPr id="24" name="Shape 20"/>
           <p:cNvSpPr/>
           <p:nvPr/>
         </p:nvSpPr>
@@ -6345,7 +6696,7 @@
       </p:sp>
       <p:sp>
         <p:nvSpPr>
-          <p:cNvPr id="24" name="Text 21"/>
+          <p:cNvPr id="25" name="Text 21"/>
           <p:cNvSpPr/>
           <p:nvPr/>
         </p:nvSpPr>
@@ -6389,7 +6740,7 @@
       </p:sp>
       <p:sp>
         <p:nvSpPr>
-          <p:cNvPr id="25" name="Text 22"/>
+          <p:cNvPr id="26" name="Text 22"/>
           <p:cNvSpPr/>
           <p:nvPr/>
         </p:nvSpPr>
@@ -6433,7 +6784,7 @@
       </p:sp>
       <p:sp>
         <p:nvSpPr>
-          <p:cNvPr id="26" name="Shape 23"/>
+          <p:cNvPr id="27" name="Shape 23"/>
           <p:cNvSpPr/>
           <p:nvPr/>
         </p:nvSpPr>
@@ -6460,7 +6811,7 @@
       </p:sp>
       <p:sp>
         <p:nvSpPr>
-          <p:cNvPr id="27" name="Text 24"/>
+          <p:cNvPr id="28" name="Text 24"/>
           <p:cNvSpPr/>
           <p:nvPr/>
         </p:nvSpPr>
@@ -6504,7 +6855,7 @@
       </p:sp>
       <p:sp>
         <p:nvSpPr>
-          <p:cNvPr id="28" name="Shape 25"/>
+          <p:cNvPr id="29" name="Shape 25"/>
           <p:cNvSpPr/>
           <p:nvPr/>
         </p:nvSpPr>
@@ -6531,7 +6882,7 @@
       </p:sp>
       <p:sp>
         <p:nvSpPr>
-          <p:cNvPr id="29" name="Text 26"/>
+          <p:cNvPr id="30" name="Text 26"/>
           <p:cNvSpPr/>
           <p:nvPr/>
         </p:nvSpPr>
@@ -6575,7 +6926,7 @@
       </p:sp>
       <p:sp>
         <p:nvSpPr>
-          <p:cNvPr id="30" name="Shape 27"/>
+          <p:cNvPr id="31" name="Shape 27"/>
           <p:cNvSpPr/>
           <p:nvPr/>
         </p:nvSpPr>
@@ -6602,7 +6953,7 @@
       </p:sp>
       <p:sp>
         <p:nvSpPr>
-          <p:cNvPr id="31" name="Text 28"/>
+          <p:cNvPr id="32" name="Text 28"/>
           <p:cNvSpPr/>
           <p:nvPr/>
         </p:nvSpPr>
@@ -6646,7 +6997,7 @@
       </p:sp>
       <p:sp>
         <p:nvSpPr>
-          <p:cNvPr id="32" name="Shape 29"/>
+          <p:cNvPr id="33" name="Shape 29"/>
           <p:cNvSpPr/>
           <p:nvPr/>
         </p:nvSpPr>
@@ -6673,7 +7024,7 @@
       </p:sp>
       <p:sp>
         <p:nvSpPr>
-          <p:cNvPr id="33" name="Text 30"/>
+          <p:cNvPr id="34" name="Text 30"/>
           <p:cNvSpPr/>
           <p:nvPr/>
         </p:nvSpPr>
@@ -6717,7 +7068,7 @@
       </p:sp>
       <p:sp>
         <p:nvSpPr>
-          <p:cNvPr id="34" name="Shape 31"/>
+          <p:cNvPr id="35" name="Shape 31"/>
           <p:cNvSpPr/>
           <p:nvPr/>
         </p:nvSpPr>
@@ -6744,7 +7095,7 @@
       </p:sp>
       <p:sp>
         <p:nvSpPr>
-          <p:cNvPr id="35" name="Text 32"/>
+          <p:cNvPr id="36" name="Text 32"/>
           <p:cNvSpPr/>
           <p:nvPr/>
         </p:nvSpPr>
@@ -6788,7 +7139,7 @@
       </p:sp>
       <p:sp>
         <p:nvSpPr>
-          <p:cNvPr id="36" name="Shape 33"/>
+          <p:cNvPr id="37" name="Shape 33"/>
           <p:cNvSpPr/>
           <p:nvPr/>
         </p:nvSpPr>
@@ -6815,7 +7166,7 @@
       </p:sp>
       <p:sp>
         <p:nvSpPr>
-          <p:cNvPr id="37" name="Text 34"/>
+          <p:cNvPr id="38" name="Text 34"/>
           <p:cNvSpPr/>
           <p:nvPr/>
         </p:nvSpPr>
@@ -6859,7 +7210,7 @@
       </p:sp>
       <p:sp>
         <p:nvSpPr>
-          <p:cNvPr id="38" name="Shape 35"/>
+          <p:cNvPr id="39" name="Shape 35"/>
           <p:cNvSpPr/>
           <p:nvPr/>
         </p:nvSpPr>
@@ -6883,7 +7234,7 @@
       </p:sp>
       <p:sp>
         <p:nvSpPr>
-          <p:cNvPr id="39" name="Shape 36"/>
+          <p:cNvPr id="40" name="Shape 36"/>
           <p:cNvSpPr/>
           <p:nvPr/>
         </p:nvSpPr>
@@ -6910,7 +7261,7 @@
       </p:sp>
       <p:sp>
         <p:nvSpPr>
-          <p:cNvPr id="40" name="Text 37"/>
+          <p:cNvPr id="41" name="Text 37"/>
           <p:cNvSpPr/>
           <p:nvPr/>
         </p:nvSpPr>
@@ -6954,7 +7305,7 @@
       </p:sp>
       <p:sp>
         <p:nvSpPr>
-          <p:cNvPr id="41" name="Shape 38"/>
+          <p:cNvPr id="42" name="Shape 38"/>
           <p:cNvSpPr/>
           <p:nvPr/>
         </p:nvSpPr>
@@ -6978,7 +7329,7 @@
       </p:sp>
       <p:sp>
         <p:nvSpPr>
-          <p:cNvPr id="42" name="Shape 39"/>
+          <p:cNvPr id="43" name="Shape 39"/>
           <p:cNvSpPr/>
           <p:nvPr/>
         </p:nvSpPr>
@@ -7005,7 +7356,7 @@
       </p:sp>
       <p:sp>
         <p:nvSpPr>
-          <p:cNvPr id="43" name="Text 40"/>
+          <p:cNvPr id="44" name="Text 40"/>
           <p:cNvSpPr/>
           <p:nvPr/>
         </p:nvSpPr>
@@ -7049,7 +7400,7 @@
       </p:sp>
       <p:sp>
         <p:nvSpPr>
-          <p:cNvPr id="44" name="Shape 41"/>
+          <p:cNvPr id="45" name="Shape 41"/>
           <p:cNvSpPr/>
           <p:nvPr/>
         </p:nvSpPr>
@@ -7073,7 +7424,7 @@
       </p:sp>
       <p:sp>
         <p:nvSpPr>
-          <p:cNvPr id="45" name="Shape 42"/>
+          <p:cNvPr id="46" name="Shape 42"/>
           <p:cNvSpPr/>
           <p:nvPr/>
         </p:nvSpPr>
@@ -7100,7 +7451,7 @@
       </p:sp>
       <p:sp>
         <p:nvSpPr>
-          <p:cNvPr id="46" name="Text 43"/>
+          <p:cNvPr id="47" name="Text 43"/>
           <p:cNvSpPr/>
           <p:nvPr/>
         </p:nvSpPr>
@@ -7144,7 +7495,7 @@
       </p:sp>
       <p:sp>
         <p:nvSpPr>
-          <p:cNvPr id="47" name="Shape 44"/>
+          <p:cNvPr id="48" name="Shape 44"/>
           <p:cNvSpPr/>
           <p:nvPr/>
         </p:nvSpPr>
@@ -7168,7 +7519,7 @@
       </p:sp>
       <p:sp>
         <p:nvSpPr>
-          <p:cNvPr id="48" name="Shape 45"/>
+          <p:cNvPr id="49" name="Shape 45"/>
           <p:cNvSpPr/>
           <p:nvPr/>
         </p:nvSpPr>
@@ -7195,7 +7546,7 @@
       </p:sp>
       <p:sp>
         <p:nvSpPr>
-          <p:cNvPr id="49" name="Text 46"/>
+          <p:cNvPr id="50" name="Text 46"/>
           <p:cNvSpPr/>
           <p:nvPr/>
         </p:nvSpPr>
@@ -7239,7 +7590,7 @@
       </p:sp>
       <p:sp>
         <p:nvSpPr>
-          <p:cNvPr id="50" name="Shape 47"/>
+          <p:cNvPr id="51" name="Shape 47"/>
           <p:cNvSpPr/>
           <p:nvPr/>
         </p:nvSpPr>
@@ -7263,7 +7614,7 @@
       </p:sp>
       <p:sp>
         <p:nvSpPr>
-          <p:cNvPr id="51" name="Shape 48"/>
+          <p:cNvPr id="52" name="Shape 48"/>
           <p:cNvSpPr/>
           <p:nvPr/>
         </p:nvSpPr>
@@ -7290,7 +7641,7 @@
       </p:sp>
       <p:sp>
         <p:nvSpPr>
-          <p:cNvPr id="52" name="Text 49"/>
+          <p:cNvPr id="53" name="Text 49"/>
           <p:cNvSpPr/>
           <p:nvPr/>
         </p:nvSpPr>
@@ -7334,7 +7685,7 @@
       </p:sp>
       <p:sp>
         <p:nvSpPr>
-          <p:cNvPr id="53" name="Shape 50"/>
+          <p:cNvPr id="54" name="Shape 50"/>
           <p:cNvSpPr/>
           <p:nvPr/>
         </p:nvSpPr>
@@ -7393,7 +7744,7 @@
         <p:spPr>
           <a:xfrm>
             <a:off x="609905" y="457200"/>
-            <a:ext cx="9525305" cy="368503"/>
+            <a:ext cx="9905695" cy="368503"/>
           </a:xfrm>
           <a:prstGeom prst="rect">
             <a:avLst/>
@@ -7418,9 +7769,9 @@
                 <a:solidFill>
                   <a:srgbClr val="C51516"/>
                 </a:solidFill>
-                <a:latin typeface="Microsoft YaHei" pitchFamily="34" charset="0"/>
-                <a:ea typeface="Microsoft YaHei" pitchFamily="34" charset="-122"/>
-                <a:cs typeface="Microsoft YaHei" pitchFamily="34" charset="-120"/>
+                <a:latin typeface="Century Gothic" pitchFamily="34" charset="0"/>
+                <a:ea typeface="Century Gothic" pitchFamily="34" charset="-122"/>
+                <a:cs typeface="Century Gothic" pitchFamily="34" charset="-120"/>
               </a:rPr>
               <a:t>Hub-Spoke Capability</a:t>
             </a:r>
@@ -7457,7 +7808,7 @@
         <p:spPr>
           <a:xfrm>
             <a:off x="609905" y="1041502"/>
-            <a:ext cx="9778594" cy="215798"/>
+            <a:ext cx="9525305" cy="215798"/>
           </a:xfrm>
           <a:prstGeom prst="rect">
             <a:avLst/>
@@ -7482,9 +7833,9 @@
                 <a:solidFill>
                   <a:srgbClr val="666666"/>
                 </a:solidFill>
-                <a:latin typeface="Microsoft YaHei" pitchFamily="34" charset="0"/>
-                <a:ea typeface="Microsoft YaHei" pitchFamily="34" charset="-122"/>
-                <a:cs typeface="Microsoft YaHei" pitchFamily="34" charset="-120"/>
+                <a:latin typeface="Century Gothic" pitchFamily="34" charset="0"/>
+                <a:ea typeface="Century Gothic" pitchFamily="34" charset="-122"/>
+                <a:cs typeface="Century Gothic" pitchFamily="34" charset="-120"/>
               </a:rPr>
               <a:t>For showing how one core system supports multiple modules or roles.</a:t>
             </a:r>
@@ -7492,9 +7843,33 @@
           </a:p>
         </p:txBody>
       </p:sp>
-      <p:sp>
-        <p:nvSpPr>
-          <p:cNvPr id="6" name="Shape 3"/>
+      <p:pic>
+        <p:nvPicPr>
+          <p:cNvPr id="6" name="Image 0" descr="theme/assets/logo-westwell.png">    </p:cNvPr>
+          <p:cNvPicPr>
+            <a:picLocks noChangeAspect="1"/>
+          </p:cNvPicPr>
+          <p:nvPr/>
+        </p:nvPicPr>
+        <p:blipFill>
+          <a:blip r:embed="rId1"/>
+          <a:stretch>
+            <a:fillRect/>
+          </a:stretch>
+        </p:blipFill>
+        <p:spPr>
+          <a:xfrm>
+            <a:off x="11162995" y="520294"/>
+            <a:ext cx="571500" cy="462686"/>
+          </a:xfrm>
+          <a:prstGeom prst="rect">
+            <a:avLst/>
+          </a:prstGeom>
+        </p:spPr>
+      </p:pic>
+      <p:sp>
+        <p:nvSpPr>
+          <p:cNvPr id="7" name="Shape 3"/>
           <p:cNvSpPr/>
           <p:nvPr/>
         </p:nvSpPr>
@@ -7528,7 +7903,7 @@
       </p:sp>
       <p:sp>
         <p:nvSpPr>
-          <p:cNvPr id="7" name="Text 4"/>
+          <p:cNvPr id="8" name="Text 4"/>
           <p:cNvSpPr/>
           <p:nvPr/>
         </p:nvSpPr>
@@ -7572,7 +7947,7 @@
       </p:sp>
       <p:sp>
         <p:nvSpPr>
-          <p:cNvPr id="8" name="Shape 5"/>
+          <p:cNvPr id="9" name="Shape 5"/>
           <p:cNvSpPr/>
           <p:nvPr/>
         </p:nvSpPr>
@@ -7595,7 +7970,7 @@
       </p:sp>
       <p:sp>
         <p:nvSpPr>
-          <p:cNvPr id="9" name="Shape 6"/>
+          <p:cNvPr id="10" name="Shape 6"/>
           <p:cNvSpPr/>
           <p:nvPr/>
         </p:nvSpPr>
@@ -7629,7 +8004,7 @@
       </p:sp>
       <p:sp>
         <p:nvSpPr>
-          <p:cNvPr id="10" name="Shape 7"/>
+          <p:cNvPr id="11" name="Shape 7"/>
           <p:cNvSpPr/>
           <p:nvPr/>
         </p:nvSpPr>
@@ -7656,7 +8031,7 @@
       </p:sp>
       <p:sp>
         <p:nvSpPr>
-          <p:cNvPr id="11" name="Shape 8"/>
+          <p:cNvPr id="12" name="Shape 8"/>
           <p:cNvSpPr/>
           <p:nvPr/>
         </p:nvSpPr>
@@ -7679,7 +8054,7 @@
       </p:sp>
       <p:sp>
         <p:nvSpPr>
-          <p:cNvPr id="12" name="Shape 9"/>
+          <p:cNvPr id="13" name="Shape 9"/>
           <p:cNvSpPr/>
           <p:nvPr/>
         </p:nvSpPr>
@@ -7702,7 +8077,7 @@
       </p:sp>
       <p:sp>
         <p:nvSpPr>
-          <p:cNvPr id="13" name="Text 10"/>
+          <p:cNvPr id="14" name="Text 10"/>
           <p:cNvSpPr/>
           <p:nvPr/>
         </p:nvSpPr>
@@ -7746,7 +8121,7 @@
       </p:sp>
       <p:sp>
         <p:nvSpPr>
-          <p:cNvPr id="14" name="Text 11"/>
+          <p:cNvPr id="15" name="Text 11"/>
           <p:cNvSpPr/>
           <p:nvPr/>
         </p:nvSpPr>
@@ -7790,7 +8165,7 @@
       </p:sp>
       <p:sp>
         <p:nvSpPr>
-          <p:cNvPr id="15" name="Shape 12"/>
+          <p:cNvPr id="16" name="Shape 12"/>
           <p:cNvSpPr/>
           <p:nvPr/>
         </p:nvSpPr>
@@ -7813,7 +8188,7 @@
       </p:sp>
       <p:sp>
         <p:nvSpPr>
-          <p:cNvPr id="16" name="Shape 13"/>
+          <p:cNvPr id="17" name="Shape 13"/>
           <p:cNvSpPr/>
           <p:nvPr/>
         </p:nvSpPr>
@@ -7847,7 +8222,7 @@
       </p:sp>
       <p:sp>
         <p:nvSpPr>
-          <p:cNvPr id="17" name="Shape 14"/>
+          <p:cNvPr id="18" name="Shape 14"/>
           <p:cNvSpPr/>
           <p:nvPr/>
         </p:nvSpPr>
@@ -7874,7 +8249,7 @@
       </p:sp>
       <p:sp>
         <p:nvSpPr>
-          <p:cNvPr id="18" name="Text 15"/>
+          <p:cNvPr id="19" name="Text 15"/>
           <p:cNvSpPr/>
           <p:nvPr/>
         </p:nvSpPr>
@@ -7913,7 +8288,7 @@
       </p:sp>
       <p:sp>
         <p:nvSpPr>
-          <p:cNvPr id="19" name="Text 16"/>
+          <p:cNvPr id="20" name="Text 16"/>
           <p:cNvSpPr/>
           <p:nvPr/>
         </p:nvSpPr>
@@ -7957,7 +8332,7 @@
       </p:sp>
       <p:sp>
         <p:nvSpPr>
-          <p:cNvPr id="20" name="Text 17"/>
+          <p:cNvPr id="21" name="Text 17"/>
           <p:cNvSpPr/>
           <p:nvPr/>
         </p:nvSpPr>
@@ -8001,7 +8376,7 @@
       </p:sp>
       <p:sp>
         <p:nvSpPr>
-          <p:cNvPr id="21" name="Shape 18"/>
+          <p:cNvPr id="22" name="Shape 18"/>
           <p:cNvSpPr/>
           <p:nvPr/>
         </p:nvSpPr>
@@ -8024,7 +8399,7 @@
       </p:sp>
       <p:sp>
         <p:nvSpPr>
-          <p:cNvPr id="22" name="Shape 19"/>
+          <p:cNvPr id="23" name="Shape 19"/>
           <p:cNvSpPr/>
           <p:nvPr/>
         </p:nvSpPr>
@@ -8058,7 +8433,7 @@
       </p:sp>
       <p:sp>
         <p:nvSpPr>
-          <p:cNvPr id="23" name="Shape 20"/>
+          <p:cNvPr id="24" name="Shape 20"/>
           <p:cNvSpPr/>
           <p:nvPr/>
         </p:nvSpPr>
@@ -8078,7 +8453,7 @@
       </p:sp>
       <p:sp>
         <p:nvSpPr>
-          <p:cNvPr id="24" name="Shape 21"/>
+          <p:cNvPr id="25" name="Shape 21"/>
           <p:cNvSpPr/>
           <p:nvPr/>
         </p:nvSpPr>
@@ -8101,7 +8476,7 @@
       </p:sp>
       <p:sp>
         <p:nvSpPr>
-          <p:cNvPr id="25" name="Shape 22"/>
+          <p:cNvPr id="26" name="Shape 22"/>
           <p:cNvSpPr/>
           <p:nvPr/>
         </p:nvSpPr>
@@ -8126,7 +8501,7 @@
       </p:sp>
       <p:sp>
         <p:nvSpPr>
-          <p:cNvPr id="26" name="Shape 23"/>
+          <p:cNvPr id="27" name="Shape 23"/>
           <p:cNvSpPr/>
           <p:nvPr/>
         </p:nvSpPr>
@@ -8149,7 +8524,7 @@
       </p:sp>
       <p:sp>
         <p:nvSpPr>
-          <p:cNvPr id="27" name="Shape 24"/>
+          <p:cNvPr id="28" name="Shape 24"/>
           <p:cNvSpPr/>
           <p:nvPr/>
         </p:nvSpPr>
@@ -8174,7 +8549,7 @@
       </p:sp>
       <p:sp>
         <p:nvSpPr>
-          <p:cNvPr id="28" name="Shape 25"/>
+          <p:cNvPr id="29" name="Shape 25"/>
           <p:cNvSpPr/>
           <p:nvPr/>
         </p:nvSpPr>
@@ -8197,7 +8572,7 @@
       </p:sp>
       <p:sp>
         <p:nvSpPr>
-          <p:cNvPr id="29" name="Shape 26"/>
+          <p:cNvPr id="30" name="Shape 26"/>
           <p:cNvSpPr/>
           <p:nvPr/>
         </p:nvSpPr>
@@ -8222,7 +8597,7 @@
       </p:sp>
       <p:sp>
         <p:nvSpPr>
-          <p:cNvPr id="30" name="Shape 27"/>
+          <p:cNvPr id="31" name="Shape 27"/>
           <p:cNvSpPr/>
           <p:nvPr/>
         </p:nvSpPr>
@@ -8245,7 +8620,7 @@
       </p:sp>
       <p:sp>
         <p:nvSpPr>
-          <p:cNvPr id="31" name="Shape 28"/>
+          <p:cNvPr id="32" name="Shape 28"/>
           <p:cNvSpPr/>
           <p:nvPr/>
         </p:nvSpPr>
@@ -8270,7 +8645,7 @@
       </p:sp>
       <p:sp>
         <p:nvSpPr>
-          <p:cNvPr id="32" name="Text 29"/>
+          <p:cNvPr id="33" name="Text 29"/>
           <p:cNvSpPr/>
           <p:nvPr/>
         </p:nvSpPr>
@@ -8314,7 +8689,7 @@
       </p:sp>
       <p:sp>
         <p:nvSpPr>
-          <p:cNvPr id="33" name="Text 30"/>
+          <p:cNvPr id="34" name="Text 30"/>
           <p:cNvSpPr/>
           <p:nvPr/>
         </p:nvSpPr>
@@ -8358,7 +8733,7 @@
       </p:sp>
       <p:sp>
         <p:nvSpPr>
-          <p:cNvPr id="34" name="Shape 31"/>
+          <p:cNvPr id="35" name="Shape 31"/>
           <p:cNvSpPr/>
           <p:nvPr/>
         </p:nvSpPr>
@@ -8381,7 +8756,7 @@
       </p:sp>
       <p:sp>
         <p:nvSpPr>
-          <p:cNvPr id="35" name="Shape 32"/>
+          <p:cNvPr id="36" name="Shape 32"/>
           <p:cNvSpPr/>
           <p:nvPr/>
         </p:nvSpPr>
@@ -8415,7 +8790,7 @@
       </p:sp>
       <p:sp>
         <p:nvSpPr>
-          <p:cNvPr id="36" name="Shape 33"/>
+          <p:cNvPr id="37" name="Shape 33"/>
           <p:cNvSpPr/>
           <p:nvPr/>
         </p:nvSpPr>
@@ -8440,7 +8815,7 @@
       </p:sp>
       <p:sp>
         <p:nvSpPr>
-          <p:cNvPr id="37" name="Shape 34"/>
+          <p:cNvPr id="38" name="Shape 34"/>
           <p:cNvSpPr/>
           <p:nvPr/>
         </p:nvSpPr>
@@ -8465,7 +8840,7 @@
       </p:sp>
       <p:sp>
         <p:nvSpPr>
-          <p:cNvPr id="38" name="Shape 35"/>
+          <p:cNvPr id="39" name="Shape 35"/>
           <p:cNvSpPr/>
           <p:nvPr/>
         </p:nvSpPr>
@@ -8490,7 +8865,7 @@
       </p:sp>
       <p:sp>
         <p:nvSpPr>
-          <p:cNvPr id="39" name="Shape 36"/>
+          <p:cNvPr id="40" name="Shape 36"/>
           <p:cNvSpPr/>
           <p:nvPr/>
         </p:nvSpPr>
@@ -8513,7 +8888,7 @@
       </p:sp>
       <p:sp>
         <p:nvSpPr>
-          <p:cNvPr id="40" name="Text 37"/>
+          <p:cNvPr id="41" name="Text 37"/>
           <p:cNvSpPr/>
           <p:nvPr/>
         </p:nvSpPr>
@@ -8557,7 +8932,7 @@
       </p:sp>
       <p:sp>
         <p:nvSpPr>
-          <p:cNvPr id="41" name="Text 38"/>
+          <p:cNvPr id="42" name="Text 38"/>
           <p:cNvSpPr/>
           <p:nvPr/>
         </p:nvSpPr>
@@ -8601,7 +8976,7 @@
       </p:sp>
       <p:sp>
         <p:nvSpPr>
-          <p:cNvPr id="42" name="Shape 39"/>
+          <p:cNvPr id="43" name="Shape 39"/>
           <p:cNvSpPr/>
           <p:nvPr/>
         </p:nvSpPr>
@@ -8624,7 +8999,7 @@
       </p:sp>
       <p:sp>
         <p:nvSpPr>
-          <p:cNvPr id="43" name="Shape 40"/>
+          <p:cNvPr id="44" name="Shape 40"/>
           <p:cNvSpPr/>
           <p:nvPr/>
         </p:nvSpPr>
@@ -8658,7 +9033,7 @@
       </p:sp>
       <p:sp>
         <p:nvSpPr>
-          <p:cNvPr id="44" name="Shape 41"/>
+          <p:cNvPr id="45" name="Shape 41"/>
           <p:cNvSpPr/>
           <p:nvPr/>
         </p:nvSpPr>
@@ -8683,7 +9058,7 @@
       </p:sp>
       <p:sp>
         <p:nvSpPr>
-          <p:cNvPr id="45" name="Shape 42"/>
+          <p:cNvPr id="46" name="Shape 42"/>
           <p:cNvSpPr/>
           <p:nvPr/>
         </p:nvSpPr>
@@ -8710,7 +9085,7 @@
       </p:sp>
       <p:sp>
         <p:nvSpPr>
-          <p:cNvPr id="46" name="Text 43"/>
+          <p:cNvPr id="47" name="Text 43"/>
           <p:cNvSpPr/>
           <p:nvPr/>
         </p:nvSpPr>
@@ -8754,7 +9129,7 @@
       </p:sp>
       <p:sp>
         <p:nvSpPr>
-          <p:cNvPr id="47" name="Text 44"/>
+          <p:cNvPr id="48" name="Text 44"/>
           <p:cNvSpPr/>
           <p:nvPr/>
         </p:nvSpPr>
@@ -8798,7 +9173,7 @@
       </p:sp>
       <p:sp>
         <p:nvSpPr>
-          <p:cNvPr id="48" name="Shape 45"/>
+          <p:cNvPr id="49" name="Shape 45"/>
           <p:cNvSpPr/>
           <p:nvPr/>
         </p:nvSpPr>
@@ -8821,7 +9196,7 @@
       </p:sp>
       <p:sp>
         <p:nvSpPr>
-          <p:cNvPr id="49" name="Shape 46"/>
+          <p:cNvPr id="50" name="Shape 46"/>
           <p:cNvSpPr/>
           <p:nvPr/>
         </p:nvSpPr>
@@ -8855,7 +9230,7 @@
       </p:sp>
       <p:sp>
         <p:nvSpPr>
-          <p:cNvPr id="50" name="Shape 47"/>
+          <p:cNvPr id="51" name="Shape 47"/>
           <p:cNvSpPr/>
           <p:nvPr/>
         </p:nvSpPr>
@@ -8880,7 +9255,7 @@
       </p:sp>
       <p:sp>
         <p:nvSpPr>
-          <p:cNvPr id="51" name="Shape 48"/>
+          <p:cNvPr id="52" name="Shape 48"/>
           <p:cNvSpPr/>
           <p:nvPr/>
         </p:nvSpPr>
@@ -8903,7 +9278,7 @@
       </p:sp>
       <p:sp>
         <p:nvSpPr>
-          <p:cNvPr id="52" name="Shape 49"/>
+          <p:cNvPr id="53" name="Shape 49"/>
           <p:cNvSpPr/>
           <p:nvPr/>
         </p:nvSpPr>
@@ -8926,7 +9301,7 @@
       </p:sp>
       <p:sp>
         <p:nvSpPr>
-          <p:cNvPr id="53" name="Text 50"/>
+          <p:cNvPr id="54" name="Text 50"/>
           <p:cNvSpPr/>
           <p:nvPr/>
         </p:nvSpPr>
@@ -8970,7 +9345,7 @@
       </p:sp>
       <p:sp>
         <p:nvSpPr>
-          <p:cNvPr id="54" name="Text 51"/>
+          <p:cNvPr id="55" name="Text 51"/>
           <p:cNvSpPr/>
           <p:nvPr/>
         </p:nvSpPr>
@@ -9014,7 +9389,7 @@
       </p:sp>
       <p:sp>
         <p:nvSpPr>
-          <p:cNvPr id="55" name="Shape 52"/>
+          <p:cNvPr id="56" name="Shape 52"/>
           <p:cNvSpPr/>
           <p:nvPr/>
         </p:nvSpPr>
@@ -9041,7 +9416,7 @@
       </p:sp>
       <p:sp>
         <p:nvSpPr>
-          <p:cNvPr id="56" name="Text 53"/>
+          <p:cNvPr id="57" name="Text 53"/>
           <p:cNvSpPr/>
           <p:nvPr/>
         </p:nvSpPr>
@@ -9085,7 +9460,7 @@
       </p:sp>
       <p:sp>
         <p:nvSpPr>
-          <p:cNvPr id="57" name="Shape 54"/>
+          <p:cNvPr id="58" name="Shape 54"/>
           <p:cNvSpPr/>
           <p:nvPr/>
         </p:nvSpPr>
@@ -9144,7 +9519,7 @@
         <p:spPr>
           <a:xfrm>
             <a:off x="609905" y="457200"/>
-            <a:ext cx="9525305" cy="368503"/>
+            <a:ext cx="9905695" cy="368503"/>
           </a:xfrm>
           <a:prstGeom prst="rect">
             <a:avLst/>
@@ -9169,9 +9544,9 @@
                 <a:solidFill>
                   <a:srgbClr val="C51516"/>
                 </a:solidFill>
-                <a:latin typeface="Microsoft YaHei" pitchFamily="34" charset="0"/>
-                <a:ea typeface="Microsoft YaHei" pitchFamily="34" charset="-122"/>
-                <a:cs typeface="Microsoft YaHei" pitchFamily="34" charset="-120"/>
+                <a:latin typeface="Century Gothic" pitchFamily="34" charset="0"/>
+                <a:ea typeface="Century Gothic" pitchFamily="34" charset="-122"/>
+                <a:cs typeface="Century Gothic" pitchFamily="34" charset="-120"/>
               </a:rPr>
               <a:t>Roadmap Swimlane</a:t>
             </a:r>
@@ -9208,7 +9583,7 @@
         <p:spPr>
           <a:xfrm>
             <a:off x="609905" y="1041502"/>
-            <a:ext cx="9778594" cy="215798"/>
+            <a:ext cx="9525305" cy="215798"/>
           </a:xfrm>
           <a:prstGeom prst="rect">
             <a:avLst/>
@@ -9233,9 +9608,9 @@
                 <a:solidFill>
                   <a:srgbClr val="666666"/>
                 </a:solidFill>
-                <a:latin typeface="Microsoft YaHei" pitchFamily="34" charset="0"/>
-                <a:ea typeface="Microsoft YaHei" pitchFamily="34" charset="-122"/>
-                <a:cs typeface="Microsoft YaHei" pitchFamily="34" charset="-120"/>
+                <a:latin typeface="Century Gothic" pitchFamily="34" charset="0"/>
+                <a:ea typeface="Century Gothic" pitchFamily="34" charset="-122"/>
+                <a:cs typeface="Century Gothic" pitchFamily="34" charset="-120"/>
               </a:rPr>
               <a:t>For version planning, delivery rhythm, and multi-team plans.</a:t>
             </a:r>
@@ -9243,9 +9618,33 @@
           </a:p>
         </p:txBody>
       </p:sp>
-      <p:sp>
-        <p:nvSpPr>
-          <p:cNvPr id="6" name="Shape 3"/>
+      <p:pic>
+        <p:nvPicPr>
+          <p:cNvPr id="6" name="Image 0" descr="theme/assets/logo-westwell.png">    </p:cNvPr>
+          <p:cNvPicPr>
+            <a:picLocks noChangeAspect="1"/>
+          </p:cNvPicPr>
+          <p:nvPr/>
+        </p:nvPicPr>
+        <p:blipFill>
+          <a:blip r:embed="rId1"/>
+          <a:stretch>
+            <a:fillRect/>
+          </a:stretch>
+        </p:blipFill>
+        <p:spPr>
+          <a:xfrm>
+            <a:off x="11162995" y="520294"/>
+            <a:ext cx="571500" cy="462686"/>
+          </a:xfrm>
+          <a:prstGeom prst="rect">
+            <a:avLst/>
+          </a:prstGeom>
+        </p:spPr>
+      </p:pic>
+      <p:sp>
+        <p:nvSpPr>
+          <p:cNvPr id="7" name="Shape 3"/>
           <p:cNvSpPr/>
           <p:nvPr/>
         </p:nvSpPr>
@@ -9267,7 +9666,7 @@
       </p:sp>
       <p:sp>
         <p:nvSpPr>
-          <p:cNvPr id="7" name="Text 4"/>
+          <p:cNvPr id="8" name="Text 4"/>
           <p:cNvSpPr/>
           <p:nvPr/>
         </p:nvSpPr>
@@ -9311,7 +9710,7 @@
       </p:sp>
       <p:sp>
         <p:nvSpPr>
-          <p:cNvPr id="8" name="Shape 5"/>
+          <p:cNvPr id="9" name="Shape 5"/>
           <p:cNvSpPr/>
           <p:nvPr/>
         </p:nvSpPr>
@@ -9333,7 +9732,7 @@
       </p:sp>
       <p:sp>
         <p:nvSpPr>
-          <p:cNvPr id="9" name="Text 6"/>
+          <p:cNvPr id="10" name="Text 6"/>
           <p:cNvSpPr/>
           <p:nvPr/>
         </p:nvSpPr>
@@ -9377,7 +9776,7 @@
       </p:sp>
       <p:sp>
         <p:nvSpPr>
-          <p:cNvPr id="10" name="Shape 7"/>
+          <p:cNvPr id="11" name="Shape 7"/>
           <p:cNvSpPr/>
           <p:nvPr/>
         </p:nvSpPr>
@@ -9399,7 +9798,7 @@
       </p:sp>
       <p:sp>
         <p:nvSpPr>
-          <p:cNvPr id="11" name="Text 8"/>
+          <p:cNvPr id="12" name="Text 8"/>
           <p:cNvSpPr/>
           <p:nvPr/>
         </p:nvSpPr>
@@ -9443,7 +9842,7 @@
       </p:sp>
       <p:sp>
         <p:nvSpPr>
-          <p:cNvPr id="12" name="Shape 9"/>
+          <p:cNvPr id="13" name="Shape 9"/>
           <p:cNvSpPr/>
           <p:nvPr/>
         </p:nvSpPr>
@@ -9465,7 +9864,7 @@
       </p:sp>
       <p:sp>
         <p:nvSpPr>
-          <p:cNvPr id="13" name="Text 10"/>
+          <p:cNvPr id="14" name="Text 10"/>
           <p:cNvSpPr/>
           <p:nvPr/>
         </p:nvSpPr>
@@ -9509,7 +9908,7 @@
       </p:sp>
       <p:sp>
         <p:nvSpPr>
-          <p:cNvPr id="14" name="Shape 11"/>
+          <p:cNvPr id="15" name="Shape 11"/>
           <p:cNvSpPr/>
           <p:nvPr/>
         </p:nvSpPr>
@@ -9531,7 +9930,7 @@
       </p:sp>
       <p:sp>
         <p:nvSpPr>
-          <p:cNvPr id="15" name="Text 12"/>
+          <p:cNvPr id="16" name="Text 12"/>
           <p:cNvSpPr/>
           <p:nvPr/>
         </p:nvSpPr>
@@ -9575,7 +9974,7 @@
       </p:sp>
       <p:sp>
         <p:nvSpPr>
-          <p:cNvPr id="16" name="Shape 13"/>
+          <p:cNvPr id="17" name="Shape 13"/>
           <p:cNvSpPr/>
           <p:nvPr/>
         </p:nvSpPr>
@@ -9602,7 +10001,7 @@
       </p:sp>
       <p:sp>
         <p:nvSpPr>
-          <p:cNvPr id="17" name="Text 14"/>
+          <p:cNvPr id="18" name="Text 14"/>
           <p:cNvSpPr/>
           <p:nvPr/>
         </p:nvSpPr>
@@ -9646,7 +10045,7 @@
       </p:sp>
       <p:sp>
         <p:nvSpPr>
-          <p:cNvPr id="18" name="Shape 15"/>
+          <p:cNvPr id="19" name="Shape 15"/>
           <p:cNvSpPr/>
           <p:nvPr/>
         </p:nvSpPr>
@@ -9673,7 +10072,7 @@
       </p:sp>
       <p:sp>
         <p:nvSpPr>
-          <p:cNvPr id="19" name="Text 16"/>
+          <p:cNvPr id="20" name="Text 16"/>
           <p:cNvSpPr/>
           <p:nvPr/>
         </p:nvSpPr>
@@ -9717,7 +10116,7 @@
       </p:sp>
       <p:sp>
         <p:nvSpPr>
-          <p:cNvPr id="20" name="Shape 17"/>
+          <p:cNvPr id="21" name="Shape 17"/>
           <p:cNvSpPr/>
           <p:nvPr/>
         </p:nvSpPr>
@@ -9744,7 +10143,7 @@
       </p:sp>
       <p:sp>
         <p:nvSpPr>
-          <p:cNvPr id="21" name="Text 18"/>
+          <p:cNvPr id="22" name="Text 18"/>
           <p:cNvSpPr/>
           <p:nvPr/>
         </p:nvSpPr>
@@ -9788,7 +10187,7 @@
       </p:sp>
       <p:sp>
         <p:nvSpPr>
-          <p:cNvPr id="22" name="Shape 19"/>
+          <p:cNvPr id="23" name="Shape 19"/>
           <p:cNvSpPr/>
           <p:nvPr/>
         </p:nvSpPr>
@@ -9815,7 +10214,7 @@
       </p:sp>
       <p:sp>
         <p:nvSpPr>
-          <p:cNvPr id="23" name="Text 20"/>
+          <p:cNvPr id="24" name="Text 20"/>
           <p:cNvSpPr/>
           <p:nvPr/>
         </p:nvSpPr>
@@ -9859,7 +10258,7 @@
       </p:sp>
       <p:sp>
         <p:nvSpPr>
-          <p:cNvPr id="24" name="Shape 21"/>
+          <p:cNvPr id="25" name="Shape 21"/>
           <p:cNvSpPr/>
           <p:nvPr/>
         </p:nvSpPr>
@@ -9886,7 +10285,7 @@
       </p:sp>
       <p:sp>
         <p:nvSpPr>
-          <p:cNvPr id="25" name="Text 22"/>
+          <p:cNvPr id="26" name="Text 22"/>
           <p:cNvSpPr/>
           <p:nvPr/>
         </p:nvSpPr>
@@ -9930,7 +10329,7 @@
       </p:sp>
       <p:sp>
         <p:nvSpPr>
-          <p:cNvPr id="26" name="Shape 23"/>
+          <p:cNvPr id="27" name="Shape 23"/>
           <p:cNvSpPr/>
           <p:nvPr/>
         </p:nvSpPr>
@@ -9957,7 +10356,7 @@
       </p:sp>
       <p:sp>
         <p:nvSpPr>
-          <p:cNvPr id="27" name="Text 24"/>
+          <p:cNvPr id="28" name="Text 24"/>
           <p:cNvSpPr/>
           <p:nvPr/>
         </p:nvSpPr>
@@ -10001,7 +10400,7 @@
       </p:sp>
       <p:sp>
         <p:nvSpPr>
-          <p:cNvPr id="28" name="Shape 25"/>
+          <p:cNvPr id="29" name="Shape 25"/>
           <p:cNvSpPr/>
           <p:nvPr/>
         </p:nvSpPr>
@@ -10028,7 +10427,7 @@
       </p:sp>
       <p:sp>
         <p:nvSpPr>
-          <p:cNvPr id="29" name="Text 26"/>
+          <p:cNvPr id="30" name="Text 26"/>
           <p:cNvSpPr/>
           <p:nvPr/>
         </p:nvSpPr>
@@ -10072,7 +10471,7 @@
       </p:sp>
       <p:sp>
         <p:nvSpPr>
-          <p:cNvPr id="30" name="Shape 27"/>
+          <p:cNvPr id="31" name="Shape 27"/>
           <p:cNvSpPr/>
           <p:nvPr/>
         </p:nvSpPr>
@@ -10099,7 +10498,7 @@
       </p:sp>
       <p:sp>
         <p:nvSpPr>
-          <p:cNvPr id="31" name="Text 28"/>
+          <p:cNvPr id="32" name="Text 28"/>
           <p:cNvSpPr/>
           <p:nvPr/>
         </p:nvSpPr>
@@ -10143,7 +10542,7 @@
       </p:sp>
       <p:sp>
         <p:nvSpPr>
-          <p:cNvPr id="32" name="Shape 29"/>
+          <p:cNvPr id="33" name="Shape 29"/>
           <p:cNvSpPr/>
           <p:nvPr/>
         </p:nvSpPr>
@@ -10170,7 +10569,7 @@
       </p:sp>
       <p:sp>
         <p:nvSpPr>
-          <p:cNvPr id="33" name="Text 30"/>
+          <p:cNvPr id="34" name="Text 30"/>
           <p:cNvSpPr/>
           <p:nvPr/>
         </p:nvSpPr>
@@ -10214,7 +10613,7 @@
       </p:sp>
       <p:sp>
         <p:nvSpPr>
-          <p:cNvPr id="34" name="Shape 31"/>
+          <p:cNvPr id="35" name="Shape 31"/>
           <p:cNvSpPr/>
           <p:nvPr/>
         </p:nvSpPr>
@@ -10241,7 +10640,7 @@
       </p:sp>
       <p:sp>
         <p:nvSpPr>
-          <p:cNvPr id="35" name="Text 32"/>
+          <p:cNvPr id="36" name="Text 32"/>
           <p:cNvSpPr/>
           <p:nvPr/>
         </p:nvSpPr>
@@ -10285,7 +10684,7 @@
       </p:sp>
       <p:sp>
         <p:nvSpPr>
-          <p:cNvPr id="36" name="Shape 33"/>
+          <p:cNvPr id="37" name="Shape 33"/>
           <p:cNvSpPr/>
           <p:nvPr/>
         </p:nvSpPr>
@@ -10312,7 +10711,7 @@
       </p:sp>
       <p:sp>
         <p:nvSpPr>
-          <p:cNvPr id="37" name="Text 34"/>
+          <p:cNvPr id="38" name="Text 34"/>
           <p:cNvSpPr/>
           <p:nvPr/>
         </p:nvSpPr>
@@ -10356,7 +10755,7 @@
       </p:sp>
       <p:sp>
         <p:nvSpPr>
-          <p:cNvPr id="38" name="Shape 35"/>
+          <p:cNvPr id="39" name="Shape 35"/>
           <p:cNvSpPr/>
           <p:nvPr/>
         </p:nvSpPr>
@@ -10383,7 +10782,7 @@
       </p:sp>
       <p:sp>
         <p:nvSpPr>
-          <p:cNvPr id="39" name="Text 36"/>
+          <p:cNvPr id="40" name="Text 36"/>
           <p:cNvSpPr/>
           <p:nvPr/>
         </p:nvSpPr>
@@ -10427,7 +10826,7 @@
       </p:sp>
       <p:sp>
         <p:nvSpPr>
-          <p:cNvPr id="40" name="Shape 37"/>
+          <p:cNvPr id="41" name="Shape 37"/>
           <p:cNvSpPr/>
           <p:nvPr/>
         </p:nvSpPr>
@@ -10454,7 +10853,7 @@
       </p:sp>
       <p:sp>
         <p:nvSpPr>
-          <p:cNvPr id="41" name="Text 38"/>
+          <p:cNvPr id="42" name="Text 38"/>
           <p:cNvSpPr/>
           <p:nvPr/>
         </p:nvSpPr>
@@ -10498,7 +10897,7 @@
       </p:sp>
       <p:sp>
         <p:nvSpPr>
-          <p:cNvPr id="42" name="Shape 39"/>
+          <p:cNvPr id="43" name="Shape 39"/>
           <p:cNvSpPr/>
           <p:nvPr/>
         </p:nvSpPr>
@@ -10525,7 +10924,7 @@
       </p:sp>
       <p:sp>
         <p:nvSpPr>
-          <p:cNvPr id="43" name="Text 40"/>
+          <p:cNvPr id="44" name="Text 40"/>
           <p:cNvSpPr/>
           <p:nvPr/>
         </p:nvSpPr>
@@ -10569,7 +10968,7 @@
       </p:sp>
       <p:sp>
         <p:nvSpPr>
-          <p:cNvPr id="44" name="Shape 41"/>
+          <p:cNvPr id="45" name="Shape 41"/>
           <p:cNvSpPr/>
           <p:nvPr/>
         </p:nvSpPr>
@@ -10596,7 +10995,7 @@
       </p:sp>
       <p:sp>
         <p:nvSpPr>
-          <p:cNvPr id="45" name="Text 42"/>
+          <p:cNvPr id="46" name="Text 42"/>
           <p:cNvSpPr/>
           <p:nvPr/>
         </p:nvSpPr>
@@ -10640,7 +11039,7 @@
       </p:sp>
       <p:sp>
         <p:nvSpPr>
-          <p:cNvPr id="46" name="Shape 43"/>
+          <p:cNvPr id="47" name="Shape 43"/>
           <p:cNvSpPr/>
           <p:nvPr/>
         </p:nvSpPr>
@@ -10667,7 +11066,7 @@
       </p:sp>
       <p:sp>
         <p:nvSpPr>
-          <p:cNvPr id="47" name="Text 44"/>
+          <p:cNvPr id="48" name="Text 44"/>
           <p:cNvSpPr/>
           <p:nvPr/>
         </p:nvSpPr>
@@ -10711,7 +11110,7 @@
       </p:sp>
       <p:sp>
         <p:nvSpPr>
-          <p:cNvPr id="48" name="Shape 45"/>
+          <p:cNvPr id="49" name="Shape 45"/>
           <p:cNvSpPr/>
           <p:nvPr/>
         </p:nvSpPr>
@@ -10738,7 +11137,7 @@
       </p:sp>
       <p:sp>
         <p:nvSpPr>
-          <p:cNvPr id="49" name="Text 46"/>
+          <p:cNvPr id="50" name="Text 46"/>
           <p:cNvSpPr/>
           <p:nvPr/>
         </p:nvSpPr>
@@ -10782,7 +11181,7 @@
       </p:sp>
       <p:sp>
         <p:nvSpPr>
-          <p:cNvPr id="50" name="Shape 47"/>
+          <p:cNvPr id="51" name="Shape 47"/>
           <p:cNvSpPr/>
           <p:nvPr/>
         </p:nvSpPr>
@@ -10809,7 +11208,7 @@
       </p:sp>
       <p:sp>
         <p:nvSpPr>
-          <p:cNvPr id="51" name="Text 48"/>
+          <p:cNvPr id="52" name="Text 48"/>
           <p:cNvSpPr/>
           <p:nvPr/>
         </p:nvSpPr>
@@ -10853,7 +11252,7 @@
       </p:sp>
       <p:sp>
         <p:nvSpPr>
-          <p:cNvPr id="52" name="Shape 49"/>
+          <p:cNvPr id="53" name="Shape 49"/>
           <p:cNvSpPr/>
           <p:nvPr/>
         </p:nvSpPr>
@@ -10876,7 +11275,244 @@
       </p:sp>
       <p:sp>
         <p:nvSpPr>
-          <p:cNvPr id="53" name="Shape 50"/>
+          <p:cNvPr id="54" name="Shape 50"/>
+          <p:cNvSpPr/>
+          <p:nvPr/>
+        </p:nvSpPr>
+        <p:spPr>
+          <a:xfrm>
+            <a:off x="355702" y="6324905"/>
+            <a:ext cx="11481206" cy="25603"/>
+          </a:xfrm>
+          <a:prstGeom prst="rect">
+            <a:avLst/>
+          </a:prstGeom>
+          <a:solidFill>
+            <a:srgbClr val="C51516"/>
+          </a:solidFill>
+          <a:ln/>
+        </p:spPr>
+      </p:sp>
+    </p:spTree>
+  </p:cSld>
+  <p:clrMapOvr>
+    <a:masterClrMapping/>
+  </p:clrMapOvr>
+</p:sld>
+</file>
+
+<file path=ppt/slides/slide9.xml><?xml version="1.0" encoding="utf-8"?>
+<p:sld xmlns:a="http://schemas.openxmlformats.org/drawingml/2006/main" xmlns:r="http://schemas.openxmlformats.org/officeDocument/2006/relationships" xmlns:p="http://schemas.openxmlformats.org/presentationml/2006/main">
+  <p:cSld name="Slide 9">
+    <p:bg>
+      <p:bgPr>
+        <a:solidFill>
+          <a:srgbClr val="F5F5F0"/>
+        </a:solidFill>
+      </p:bgPr>
+    </p:bg>
+    <p:spTree>
+      <p:nvGrpSpPr>
+        <p:cNvPr id="1" name=""/>
+        <p:cNvGrpSpPr/>
+        <p:nvPr/>
+      </p:nvGrpSpPr>
+      <p:grpSpPr>
+        <a:xfrm>
+          <a:off x="0" y="0"/>
+          <a:ext cx="0" cy="0"/>
+          <a:chOff x="0" y="0"/>
+          <a:chExt cx="0" cy="0"/>
+        </a:xfrm>
+      </p:grpSpPr>
+      <p:pic>
+        <p:nvPicPr>
+          <p:cNvPr id="3" name="Image 0" descr="theme/assets/logo-westwell.png">    </p:cNvPr>
+          <p:cNvPicPr>
+            <a:picLocks noChangeAspect="1"/>
+          </p:cNvPicPr>
+          <p:nvPr/>
+        </p:nvPicPr>
+        <p:blipFill>
+          <a:blip r:embed="rId1"/>
+          <a:stretch>
+            <a:fillRect/>
+          </a:stretch>
+        </p:blipFill>
+        <p:spPr>
+          <a:xfrm>
+            <a:off x="11162995" y="520294"/>
+            <a:ext cx="571500" cy="462686"/>
+          </a:xfrm>
+          <a:prstGeom prst="rect">
+            <a:avLst/>
+          </a:prstGeom>
+        </p:spPr>
+      </p:pic>
+      <p:sp>
+        <p:nvSpPr>
+          <p:cNvPr id="4" name="Text 0"/>
+          <p:cNvSpPr/>
+          <p:nvPr/>
+        </p:nvSpPr>
+        <p:spPr>
+          <a:xfrm>
+            <a:off x="2286000" y="2730398"/>
+            <a:ext cx="7619695" cy="609905"/>
+          </a:xfrm>
+          <a:prstGeom prst="rect">
+            <a:avLst/>
+          </a:prstGeom>
+          <a:noFill/>
+          <a:ln/>
+        </p:spPr>
+        <p:txBody>
+          <a:bodyPr wrap="square" lIns="0" tIns="0" rIns="0" bIns="0" rtlCol="0" anchor="ctr">
+            <a:normAutofit/>
+          </a:bodyPr>
+          <a:lstStyle/>
+          <a:p>
+            <a:pPr algn="ctr" indent="0" marL="0">
+              <a:buNone/>
+            </a:pPr>
+            <a:r>
+              <a:rPr lang="en-US" sz="2700" b="1" dirty="0">
+                <a:solidFill>
+                  <a:srgbClr val="07195A"/>
+                </a:solidFill>
+                <a:latin typeface="Microsoft YaHei" pitchFamily="34" charset="0"/>
+                <a:ea typeface="Microsoft YaHei" pitchFamily="34" charset="-122"/>
+                <a:cs typeface="Microsoft YaHei" pitchFamily="34" charset="-120"/>
+              </a:rPr>
+              <a:t>把重复的页面问题，沉淀为可复用的</a:t>
+            </a:r>
+            <a:pPr algn="ctr" indent="0" marL="0">
+              <a:buNone/>
+            </a:pPr>
+            <a:r>
+              <a:rPr lang="en-US" sz="2700" b="1" dirty="0">
+                <a:solidFill>
+                  <a:srgbClr val="C51516"/>
+                </a:solidFill>
+                <a:latin typeface="Microsoft YaHei" pitchFamily="34" charset="0"/>
+                <a:ea typeface="Microsoft YaHei" pitchFamily="34" charset="-122"/>
+                <a:cs typeface="Microsoft YaHei" pitchFamily="34" charset="-120"/>
+              </a:rPr>
+              <a:t>组件</a:t>
+            </a:r>
+            <a:pPr algn="ctr" indent="0" marL="0">
+              <a:buNone/>
+            </a:pPr>
+            <a:r>
+              <a:rPr lang="en-US" sz="2700" b="1" dirty="0">
+                <a:solidFill>
+                  <a:srgbClr val="07195A"/>
+                </a:solidFill>
+                <a:latin typeface="Microsoft YaHei" pitchFamily="34" charset="0"/>
+                <a:ea typeface="Microsoft YaHei" pitchFamily="34" charset="-122"/>
+                <a:cs typeface="Microsoft YaHei" pitchFamily="34" charset="-120"/>
+              </a:rPr>
+              <a:t>与</a:t>
+            </a:r>
+            <a:pPr algn="ctr" indent="0" marL="0">
+              <a:buNone/>
+            </a:pPr>
+            <a:r>
+              <a:rPr lang="en-US" sz="2700" b="1" dirty="0">
+                <a:solidFill>
+                  <a:srgbClr val="C51516"/>
+                </a:solidFill>
+                <a:latin typeface="Microsoft YaHei" pitchFamily="34" charset="0"/>
+                <a:ea typeface="Microsoft YaHei" pitchFamily="34" charset="-122"/>
+                <a:cs typeface="Microsoft YaHei" pitchFamily="34" charset="-120"/>
+              </a:rPr>
+              <a:t>规则</a:t>
+            </a:r>
+            <a:pPr algn="ctr" indent="0" marL="0">
+              <a:buNone/>
+            </a:pPr>
+            <a:r>
+              <a:rPr lang="en-US" sz="2700" b="1" dirty="0">
+                <a:solidFill>
+                  <a:srgbClr val="07195A"/>
+                </a:solidFill>
+                <a:latin typeface="Microsoft YaHei" pitchFamily="34" charset="0"/>
+                <a:ea typeface="Microsoft YaHei" pitchFamily="34" charset="-122"/>
+                <a:cs typeface="Microsoft YaHei" pitchFamily="34" charset="-120"/>
+              </a:rPr>
+              <a:t>。</a:t>
+            </a:r>
+            <a:endParaRPr lang="en-US" sz="2700" dirty="0"/>
+          </a:p>
+        </p:txBody>
+      </p:sp>
+      <p:sp>
+        <p:nvSpPr>
+          <p:cNvPr id="5" name="Shape 1"/>
+          <p:cNvSpPr/>
+          <p:nvPr/>
+        </p:nvSpPr>
+        <p:spPr>
+          <a:xfrm>
+            <a:off x="5143500" y="3480206"/>
+            <a:ext cx="1904695" cy="19202"/>
+          </a:xfrm>
+          <a:prstGeom prst="rect">
+            <a:avLst/>
+          </a:prstGeom>
+          <a:solidFill>
+            <a:srgbClr val="07195A"/>
+          </a:solidFill>
+          <a:ln/>
+        </p:spPr>
+      </p:sp>
+      <p:sp>
+        <p:nvSpPr>
+          <p:cNvPr id="6" name="Text 2"/>
+          <p:cNvSpPr/>
+          <p:nvPr/>
+        </p:nvSpPr>
+        <p:spPr>
+          <a:xfrm>
+            <a:off x="2286000" y="3657600"/>
+            <a:ext cx="7619695" cy="279806"/>
+          </a:xfrm>
+          <a:prstGeom prst="rect">
+            <a:avLst/>
+          </a:prstGeom>
+          <a:noFill/>
+          <a:ln/>
+        </p:spPr>
+        <p:txBody>
+          <a:bodyPr wrap="square" lIns="0" tIns="0" rIns="0" bIns="0" rtlCol="0" anchor="t">
+            <a:normAutofit/>
+          </a:bodyPr>
+          <a:lstStyle/>
+          <a:p>
+            <a:pPr algn="ctr" indent="0" marL="0">
+              <a:lnSpc>
+                <a:spcPct val="100000"/>
+              </a:lnSpc>
+              <a:buNone/>
+            </a:pPr>
+            <a:r>
+              <a:rPr lang="en-US" sz="1300" b="1" dirty="0">
+                <a:solidFill>
+                  <a:srgbClr val="C51516"/>
+                </a:solidFill>
+                <a:latin typeface="Century Gothic" pitchFamily="34" charset="0"/>
+                <a:ea typeface="Century Gothic" pitchFamily="34" charset="-122"/>
+                <a:cs typeface="Century Gothic" pitchFamily="34" charset="-120"/>
+              </a:rPr>
+              <a:t>Make a Well Change.</a:t>
+            </a:r>
+            <a:endParaRPr lang="en-US" sz="1300" dirty="0"/>
+          </a:p>
+        </p:txBody>
+      </p:sp>
+      <p:sp>
+        <p:nvSpPr>
+          <p:cNvPr id="7" name="Shape 3"/>
           <p:cNvSpPr/>
           <p:nvPr/>
         </p:nvSpPr>
